--- a/book/slides/pptx/ch07-graph.pptx
+++ b/book/slides/pptx/ch07-graph.pptx
@@ -17756,8 +17756,8 @@
         </p:nvSpPr>
         <p:spPr>
           <a:xfrm>
-            <a:off x="566928" y="1297676"/>
-            <a:ext cx="11058144" cy="287944"/>
+            <a:off x="566928" y="1172921"/>
+            <a:ext cx="11058144" cy="269565"/>
           </a:xfrm>
           <a:prstGeom prst="rect">
             <a:avLst/>
@@ -17777,7 +17777,7 @@
               <a:buNone/>
             </a:pPr>
             <a:r>
-              <a:rPr lang="zh-CN" sz="1692" dirty="0">
+              <a:rPr lang="zh-CN" sz="1584" dirty="0">
                 <a:solidFill>
                   <a:srgbClr val="1A1A18"/>
                 </a:solidFill>
@@ -17788,7 +17788,7 @@
               <a:t>“相邻矩阵”是原书沿用的</a:t>
             </a:r>
             <a:r>
-              <a:rPr lang="zh-CN" sz="1692" dirty="0" b="1">
+              <a:rPr lang="zh-CN" sz="1584" dirty="0" b="1">
                 <a:solidFill>
                   <a:srgbClr val="8A4B2A"/>
                 </a:solidFill>
@@ -17799,7 +17799,7 @@
               <a:t>历史教材称呼</a:t>
             </a:r>
             <a:r>
-              <a:rPr lang="zh-CN" sz="1692" dirty="0">
+              <a:rPr lang="zh-CN" sz="1584" dirty="0">
                 <a:solidFill>
                   <a:srgbClr val="1A1A18"/>
                 </a:solidFill>
@@ -17810,7 +17810,7 @@
               <a:t>；现代资料通常称</a:t>
             </a:r>
             <a:r>
-              <a:rPr lang="zh-CN" sz="1692" dirty="0" b="1">
+              <a:rPr lang="zh-CN" sz="1584" dirty="0" b="1">
                 <a:solidFill>
                   <a:srgbClr val="8A4B2A"/>
                 </a:solidFill>
@@ -17821,7 +17821,7 @@
               <a:t>邻接矩阵</a:t>
             </a:r>
             <a:r>
-              <a:rPr lang="zh-CN" sz="1692" dirty="0">
+              <a:rPr lang="zh-CN" sz="1584" dirty="0">
                 <a:solidFill>
                   <a:srgbClr val="1A1A18"/>
                 </a:solidFill>
@@ -17842,8 +17842,8 @@
         </p:nvSpPr>
         <p:spPr>
           <a:xfrm>
-            <a:off x="566928" y="1633372"/>
-            <a:ext cx="11058144" cy="287944"/>
+            <a:off x="566928" y="1487190"/>
+            <a:ext cx="11058144" cy="269565"/>
           </a:xfrm>
           <a:prstGeom prst="rect">
             <a:avLst/>
@@ -17863,7 +17863,7 @@
               <a:buNone/>
             </a:pPr>
             <a:r>
-              <a:rPr lang="zh-CN" sz="1692" dirty="0">
+              <a:rPr lang="zh-CN" sz="1584" dirty="0">
                 <a:solidFill>
                   <a:srgbClr val="2C6B57"/>
                 </a:solidFill>
@@ -17874,7 +17874,7 @@
               <a:t>m[i][j]</a:t>
             </a:r>
             <a:r>
-              <a:rPr lang="zh-CN" sz="1692" dirty="0">
+              <a:rPr lang="zh-CN" sz="1584" dirty="0">
                 <a:solidFill>
                   <a:srgbClr val="1A1A18"/>
                 </a:solidFill>
@@ -17895,8 +17895,8 @@
         </p:nvSpPr>
         <p:spPr>
           <a:xfrm>
-            <a:off x="566928" y="2016820"/>
-            <a:ext cx="11058144" cy="4097731"/>
+            <a:off x="566928" y="1846163"/>
+            <a:ext cx="11058144" cy="4396191"/>
           </a:xfrm>
           <a:prstGeom prst="roundRect">
             <a:avLst>
@@ -17925,7 +17925,7 @@
               <a:buNone/>
             </a:pPr>
             <a:r>
-              <a:rPr lang="zh-CN" sz="879" dirty="0">
+              <a:rPr lang="zh-CN" sz="823" dirty="0">
                 <a:solidFill>
                   <a:srgbClr val="6B6B66"/>
                 </a:solidFill>
@@ -17944,7 +17944,7 @@
               <a:buNone/>
             </a:pPr>
             <a:r>
-              <a:rPr lang="zh-CN" sz="1128" dirty="0">
+              <a:rPr lang="zh-CN" sz="1056" dirty="0">
                 <a:solidFill>
                   <a:srgbClr val="8A4B2A"/>
                 </a:solidFill>
@@ -17955,7 +17955,7 @@
               <a:t>explicit</a:t>
             </a:r>
             <a:r>
-              <a:rPr lang="zh-CN" sz="1128" dirty="0">
+              <a:rPr lang="zh-CN" sz="1056" dirty="0">
                 <a:solidFill>
                   <a:srgbClr val="1A1A18"/>
                 </a:solidFill>
@@ -17966,7 +17966,7 @@
               <a:t> Graph(std::</a:t>
             </a:r>
             <a:r>
-              <a:rPr lang="zh-CN" sz="1128" dirty="0">
+              <a:rPr lang="zh-CN" sz="1056" dirty="0">
                 <a:solidFill>
                   <a:srgbClr val="2C6B57"/>
                 </a:solidFill>
@@ -17977,7 +17977,7 @@
               <a:t>size_t</a:t>
             </a:r>
             <a:r>
-              <a:rPr lang="zh-CN" sz="1128" dirty="0">
+              <a:rPr lang="zh-CN" sz="1056" dirty="0">
                 <a:solidFill>
                   <a:srgbClr val="1A1A18"/>
                 </a:solidFill>
@@ -17988,7 +17988,7 @@
               <a:t> count) : adjacency_(count, std::vector&lt;</a:t>
             </a:r>
             <a:r>
-              <a:rPr lang="zh-CN" sz="1128" dirty="0">
+              <a:rPr lang="zh-CN" sz="1056" dirty="0">
                 <a:solidFill>
                   <a:srgbClr val="2C6B57"/>
                 </a:solidFill>
@@ -17999,7 +17999,7 @@
               <a:t>int</a:t>
             </a:r>
             <a:r>
-              <a:rPr lang="zh-CN" sz="1128" dirty="0">
+              <a:rPr lang="zh-CN" sz="1056" dirty="0">
                 <a:solidFill>
                   <a:srgbClr val="1A1A18"/>
                 </a:solidFill>
@@ -18018,7 +18018,7 @@
               <a:buNone/>
             </a:pPr>
             <a:r>
-              <a:rPr lang="zh-CN" sz="1128" dirty="0">
+              <a:rPr lang="zh-CN" sz="1056" dirty="0">
                 <a:solidFill>
                   <a:srgbClr val="1A1A18"/>
                 </a:solidFill>
@@ -18029,7 +18029,7 @@
               <a:t>    </a:t>
             </a:r>
             <a:r>
-              <a:rPr lang="zh-CN" sz="1128" dirty="0">
+              <a:rPr lang="zh-CN" sz="1056" dirty="0">
                 <a:solidFill>
                   <a:srgbClr val="8A4B2A"/>
                 </a:solidFill>
@@ -18040,7 +18040,7 @@
               <a:t>for</a:t>
             </a:r>
             <a:r>
-              <a:rPr lang="zh-CN" sz="1128" dirty="0">
+              <a:rPr lang="zh-CN" sz="1056" dirty="0">
                 <a:solidFill>
                   <a:srgbClr val="1A1A18"/>
                 </a:solidFill>
@@ -18051,7 +18051,7 @@
               <a:t> (std::</a:t>
             </a:r>
             <a:r>
-              <a:rPr lang="zh-CN" sz="1128" dirty="0">
+              <a:rPr lang="zh-CN" sz="1056" dirty="0">
                 <a:solidFill>
                   <a:srgbClr val="2C6B57"/>
                 </a:solidFill>
@@ -18062,7 +18062,7 @@
               <a:t>size_t</a:t>
             </a:r>
             <a:r>
-              <a:rPr lang="zh-CN" sz="1128" dirty="0">
+              <a:rPr lang="zh-CN" sz="1056" dirty="0">
                 <a:solidFill>
                   <a:srgbClr val="1A1A18"/>
                 </a:solidFill>
@@ -18073,7 +18073,7 @@
               <a:t> vertex = </a:t>
             </a:r>
             <a:r>
-              <a:rPr lang="zh-CN" sz="1128" dirty="0">
+              <a:rPr lang="zh-CN" sz="1056" dirty="0">
                 <a:solidFill>
                   <a:srgbClr val="4A5AA8"/>
                 </a:solidFill>
@@ -18084,7 +18084,7 @@
               <a:t>0</a:t>
             </a:r>
             <a:r>
-              <a:rPr lang="zh-CN" sz="1128" dirty="0">
+              <a:rPr lang="zh-CN" sz="1056" dirty="0">
                 <a:solidFill>
                   <a:srgbClr val="1A1A18"/>
                 </a:solidFill>
@@ -18103,7 +18103,7 @@
               <a:buNone/>
             </a:pPr>
             <a:r>
-              <a:rPr lang="zh-CN" sz="1128" dirty="0">
+              <a:rPr lang="zh-CN" sz="1056" dirty="0">
                 <a:solidFill>
                   <a:srgbClr val="1A1A18"/>
                 </a:solidFill>
@@ -18114,7 +18114,7 @@
               <a:t>        adjacency_[vertex][vertex] = </a:t>
             </a:r>
             <a:r>
-              <a:rPr lang="zh-CN" sz="1128" dirty="0">
+              <a:rPr lang="zh-CN" sz="1056" dirty="0">
                 <a:solidFill>
                   <a:srgbClr val="4A5AA8"/>
                 </a:solidFill>
@@ -18125,7 +18125,7 @@
               <a:t>0</a:t>
             </a:r>
             <a:r>
-              <a:rPr lang="zh-CN" sz="1128" dirty="0">
+              <a:rPr lang="zh-CN" sz="1056" dirty="0">
                 <a:solidFill>
                   <a:srgbClr val="1A1A18"/>
                 </a:solidFill>
@@ -18144,7 +18144,7 @@
               <a:buNone/>
             </a:pPr>
             <a:r>
-              <a:rPr lang="zh-CN" sz="1128" dirty="0">
+              <a:rPr lang="zh-CN" sz="1056" dirty="0">
                 <a:solidFill>
                   <a:srgbClr val="1A1A18"/>
                 </a:solidFill>
@@ -18163,7 +18163,7 @@
               <a:buNone/>
             </a:pPr>
             <a:r>
-              <a:rPr lang="zh-CN" sz="1128" dirty="0">
+              <a:rPr lang="zh-CN" sz="1056" dirty="0">
                 <a:solidFill>
                   <a:srgbClr val="1A1A18"/>
                 </a:solidFill>
@@ -18182,7 +18182,7 @@
               <a:buNone/>
             </a:pPr>
             <a:r>
-              <a:rPr lang="zh-CN" sz="1128" dirty="0">
+              <a:rPr lang="zh-CN" sz="1056" dirty="0">
                 <a:solidFill>
                   <a:srgbClr val="1A1A18"/>
                 </a:solidFill>
@@ -18201,7 +18201,7 @@
               <a:buNone/>
             </a:pPr>
             <a:r>
-              <a:rPr lang="zh-CN" sz="1128" dirty="0">
+              <a:rPr lang="zh-CN" sz="1056" dirty="0">
                 <a:solidFill>
                   <a:srgbClr val="1A1A18"/>
                 </a:solidFill>
@@ -18212,7 +18212,7 @@
               <a:t>[[nodiscard]] std::</a:t>
             </a:r>
             <a:r>
-              <a:rPr lang="zh-CN" sz="1128" dirty="0">
+              <a:rPr lang="zh-CN" sz="1056" dirty="0">
                 <a:solidFill>
                   <a:srgbClr val="2C6B57"/>
                 </a:solidFill>
@@ -18223,7 +18223,7 @@
               <a:t>size_t</a:t>
             </a:r>
             <a:r>
-              <a:rPr lang="zh-CN" sz="1128" dirty="0">
+              <a:rPr lang="zh-CN" sz="1056" dirty="0">
                 <a:solidFill>
                   <a:srgbClr val="1A1A18"/>
                 </a:solidFill>
@@ -18234,7 +18234,7 @@
               <a:t> vertices() </a:t>
             </a:r>
             <a:r>
-              <a:rPr lang="zh-CN" sz="1128" dirty="0">
+              <a:rPr lang="zh-CN" sz="1056" dirty="0">
                 <a:solidFill>
                   <a:srgbClr val="8A4B2A"/>
                 </a:solidFill>
@@ -18245,7 +18245,7 @@
               <a:t>const</a:t>
             </a:r>
             <a:r>
-              <a:rPr lang="zh-CN" sz="1128" dirty="0">
+              <a:rPr lang="zh-CN" sz="1056" dirty="0">
                 <a:solidFill>
                   <a:srgbClr val="1A1A18"/>
                 </a:solidFill>
@@ -18256,7 +18256,7 @@
               <a:t> </a:t>
             </a:r>
             <a:r>
-              <a:rPr lang="zh-CN" sz="1128" dirty="0">
+              <a:rPr lang="zh-CN" sz="1056" dirty="0">
                 <a:solidFill>
                   <a:srgbClr val="8A4B2A"/>
                 </a:solidFill>
@@ -18267,7 +18267,7 @@
               <a:t>noexcept</a:t>
             </a:r>
             <a:r>
-              <a:rPr lang="zh-CN" sz="1128" dirty="0">
+              <a:rPr lang="zh-CN" sz="1056" dirty="0">
                 <a:solidFill>
                   <a:srgbClr val="1A1A18"/>
                 </a:solidFill>
@@ -18278,7 +18278,7 @@
               <a:t> { </a:t>
             </a:r>
             <a:r>
-              <a:rPr lang="zh-CN" sz="1128" dirty="0">
+              <a:rPr lang="zh-CN" sz="1056" dirty="0">
                 <a:solidFill>
                   <a:srgbClr val="8A4B2A"/>
                 </a:solidFill>
@@ -18289,7 +18289,7 @@
               <a:t>return</a:t>
             </a:r>
             <a:r>
-              <a:rPr lang="zh-CN" sz="1128" dirty="0">
+              <a:rPr lang="zh-CN" sz="1056" dirty="0">
                 <a:solidFill>
                   <a:srgbClr val="1A1A18"/>
                 </a:solidFill>
@@ -18308,7 +18308,7 @@
               <a:buNone/>
             </a:pPr>
             <a:r>
-              <a:rPr lang="zh-CN" sz="1128" dirty="0">
+              <a:rPr lang="zh-CN" sz="1056" dirty="0">
                 <a:solidFill>
                   <a:srgbClr val="1A1A18"/>
                 </a:solidFill>
@@ -18327,7 +18327,7 @@
               <a:buNone/>
             </a:pPr>
             <a:r>
-              <a:rPr lang="zh-CN" sz="1128" dirty="0">
+              <a:rPr lang="zh-CN" sz="1056" dirty="0">
                 <a:solidFill>
                   <a:srgbClr val="2C6B57"/>
                 </a:solidFill>
@@ -18338,7 +18338,7 @@
               <a:t>void</a:t>
             </a:r>
             <a:r>
-              <a:rPr lang="zh-CN" sz="1128" dirty="0">
+              <a:rPr lang="zh-CN" sz="1056" dirty="0">
                 <a:solidFill>
                   <a:srgbClr val="1A1A18"/>
                 </a:solidFill>
@@ -18349,7 +18349,7 @@
               <a:t> add_edge(std::</a:t>
             </a:r>
             <a:r>
-              <a:rPr lang="zh-CN" sz="1128" dirty="0">
+              <a:rPr lang="zh-CN" sz="1056" dirty="0">
                 <a:solidFill>
                   <a:srgbClr val="2C6B57"/>
                 </a:solidFill>
@@ -18360,7 +18360,7 @@
               <a:t>size_t</a:t>
             </a:r>
             <a:r>
-              <a:rPr lang="zh-CN" sz="1128" dirty="0">
+              <a:rPr lang="zh-CN" sz="1056" dirty="0">
                 <a:solidFill>
                   <a:srgbClr val="1A1A18"/>
                 </a:solidFill>
@@ -18371,7 +18371,7 @@
               <a:t> from, std::</a:t>
             </a:r>
             <a:r>
-              <a:rPr lang="zh-CN" sz="1128" dirty="0">
+              <a:rPr lang="zh-CN" sz="1056" dirty="0">
                 <a:solidFill>
                   <a:srgbClr val="2C6B57"/>
                 </a:solidFill>
@@ -18382,7 +18382,7 @@
               <a:t>size_t</a:t>
             </a:r>
             <a:r>
-              <a:rPr lang="zh-CN" sz="1128" dirty="0">
+              <a:rPr lang="zh-CN" sz="1056" dirty="0">
                 <a:solidFill>
                   <a:srgbClr val="1A1A18"/>
                 </a:solidFill>
@@ -18393,7 +18393,7 @@
               <a:t> to, </a:t>
             </a:r>
             <a:r>
-              <a:rPr lang="zh-CN" sz="1128" dirty="0">
+              <a:rPr lang="zh-CN" sz="1056" dirty="0">
                 <a:solidFill>
                   <a:srgbClr val="2C6B57"/>
                 </a:solidFill>
@@ -18404,7 +18404,7 @@
               <a:t>int</a:t>
             </a:r>
             <a:r>
-              <a:rPr lang="zh-CN" sz="1128" dirty="0">
+              <a:rPr lang="zh-CN" sz="1056" dirty="0">
                 <a:solidFill>
                   <a:srgbClr val="1A1A18"/>
                 </a:solidFill>
@@ -18415,7 +18415,7 @@
               <a:t> weight, </a:t>
             </a:r>
             <a:r>
-              <a:rPr lang="zh-CN" sz="1128" dirty="0">
+              <a:rPr lang="zh-CN" sz="1056" dirty="0">
                 <a:solidFill>
                   <a:srgbClr val="2C6B57"/>
                 </a:solidFill>
@@ -18426,7 +18426,7 @@
               <a:t>bool</a:t>
             </a:r>
             <a:r>
-              <a:rPr lang="zh-CN" sz="1128" dirty="0">
+              <a:rPr lang="zh-CN" sz="1056" dirty="0">
                 <a:solidFill>
                   <a:srgbClr val="1A1A18"/>
                 </a:solidFill>
@@ -18437,7 +18437,7 @@
               <a:t> directed = </a:t>
             </a:r>
             <a:r>
-              <a:rPr lang="zh-CN" sz="1128" dirty="0">
+              <a:rPr lang="zh-CN" sz="1056" dirty="0">
                 <a:solidFill>
                   <a:srgbClr val="8A4B2A"/>
                 </a:solidFill>
@@ -18448,7 +18448,7 @@
               <a:t>true</a:t>
             </a:r>
             <a:r>
-              <a:rPr lang="zh-CN" sz="1128" dirty="0">
+              <a:rPr lang="zh-CN" sz="1056" dirty="0">
                 <a:solidFill>
                   <a:srgbClr val="1A1A18"/>
                 </a:solidFill>
@@ -18467,7 +18467,7 @@
               <a:buNone/>
             </a:pPr>
             <a:r>
-              <a:rPr lang="zh-CN" sz="1128" dirty="0">
+              <a:rPr lang="zh-CN" sz="1056" dirty="0">
                 <a:solidFill>
                   <a:srgbClr val="1A1A18"/>
                 </a:solidFill>
@@ -18486,7 +18486,7 @@
               <a:buNone/>
             </a:pPr>
             <a:r>
-              <a:rPr lang="zh-CN" sz="1128" dirty="0">
+              <a:rPr lang="zh-CN" sz="1056" dirty="0">
                 <a:solidFill>
                   <a:srgbClr val="1A1A18"/>
                 </a:solidFill>
@@ -18505,7 +18505,7 @@
               <a:buNone/>
             </a:pPr>
             <a:r>
-              <a:rPr lang="zh-CN" sz="1128" dirty="0">
+              <a:rPr lang="zh-CN" sz="1056" dirty="0">
                 <a:solidFill>
                   <a:srgbClr val="1A1A18"/>
                 </a:solidFill>
@@ -18516,7 +18516,7 @@
               <a:t>    </a:t>
             </a:r>
             <a:r>
-              <a:rPr lang="zh-CN" sz="1128" dirty="0">
+              <a:rPr lang="zh-CN" sz="1056" dirty="0">
                 <a:solidFill>
                   <a:srgbClr val="8A4B2A"/>
                 </a:solidFill>
@@ -18527,7 +18527,7 @@
               <a:t>if</a:t>
             </a:r>
             <a:r>
-              <a:rPr lang="zh-CN" sz="1128" dirty="0">
+              <a:rPr lang="zh-CN" sz="1056" dirty="0">
                 <a:solidFill>
                   <a:srgbClr val="1A1A18"/>
                 </a:solidFill>
@@ -18538,7 +18538,7 @@
               <a:t> (weight &lt; </a:t>
             </a:r>
             <a:r>
-              <a:rPr lang="zh-CN" sz="1128" dirty="0">
+              <a:rPr lang="zh-CN" sz="1056" dirty="0">
                 <a:solidFill>
                   <a:srgbClr val="4A5AA8"/>
                 </a:solidFill>
@@ -18549,7 +18549,7 @@
               <a:t>0</a:t>
             </a:r>
             <a:r>
-              <a:rPr lang="zh-CN" sz="1128" dirty="0">
+              <a:rPr lang="zh-CN" sz="1056" dirty="0">
                 <a:solidFill>
                   <a:srgbClr val="1A1A18"/>
                 </a:solidFill>
@@ -18568,7 +18568,7 @@
               <a:buNone/>
             </a:pPr>
             <a:r>
-              <a:rPr lang="zh-CN" sz="1128" dirty="0">
+              <a:rPr lang="zh-CN" sz="1056" dirty="0">
                 <a:solidFill>
                   <a:srgbClr val="1A1A18"/>
                 </a:solidFill>
@@ -18579,7 +18579,7 @@
               <a:t>        </a:t>
             </a:r>
             <a:r>
-              <a:rPr lang="zh-CN" sz="1128" dirty="0">
+              <a:rPr lang="zh-CN" sz="1056" dirty="0">
                 <a:solidFill>
                   <a:srgbClr val="8A4B2A"/>
                 </a:solidFill>
@@ -18590,7 +18590,7 @@
               <a:t>throw</a:t>
             </a:r>
             <a:r>
-              <a:rPr lang="zh-CN" sz="1128" dirty="0">
+              <a:rPr lang="zh-CN" sz="1056" dirty="0">
                 <a:solidFill>
                   <a:srgbClr val="1A1A18"/>
                 </a:solidFill>
@@ -18601,7 +18601,7 @@
               <a:t> std::invalid_argument(</a:t>
             </a:r>
             <a:r>
-              <a:rPr lang="zh-CN" sz="1128" dirty="0">
+              <a:rPr lang="zh-CN" sz="1056" dirty="0">
                 <a:solidFill>
                   <a:srgbClr val="7A5C1E"/>
                 </a:solidFill>
@@ -18612,7 +18612,7 @@
               <a:t>"negative edge"</a:t>
             </a:r>
             <a:r>
-              <a:rPr lang="zh-CN" sz="1128" dirty="0">
+              <a:rPr lang="zh-CN" sz="1056" dirty="0">
                 <a:solidFill>
                   <a:srgbClr val="1A1A18"/>
                 </a:solidFill>
@@ -18631,7 +18631,7 @@
               <a:buNone/>
             </a:pPr>
             <a:r>
-              <a:rPr lang="zh-CN" sz="1128" dirty="0">
+              <a:rPr lang="zh-CN" sz="1056" dirty="0">
                 <a:solidFill>
                   <a:srgbClr val="1A1A18"/>
                 </a:solidFill>
@@ -18650,7 +18650,141 @@
               <a:buNone/>
             </a:pPr>
             <a:r>
-              <a:rPr lang="zh-CN" sz="1128" dirty="0">
+              <a:rPr lang="zh-CN" sz="1056" dirty="0">
+                <a:solidFill>
+                  <a:srgbClr val="1A1A18"/>
+                </a:solidFill>
+                <a:latin typeface="Noto Sans Mono CJK SC"/>
+                <a:ea typeface="Noto Sans Mono CJK SC"/>
+                <a:cs typeface="Noto Sans Mono CJK SC"/>
+              </a:rPr>
+              <a:t>    </a:t>
+            </a:r>
+            <a:r>
+              <a:rPr lang="zh-CN" sz="1056" dirty="0">
+                <a:solidFill>
+                  <a:srgbClr val="8A4B2A"/>
+                </a:solidFill>
+                <a:latin typeface="Noto Sans Mono CJK SC"/>
+                <a:ea typeface="Noto Sans Mono CJK SC"/>
+                <a:cs typeface="Noto Sans Mono CJK SC"/>
+              </a:rPr>
+              <a:t>if</a:t>
+            </a:r>
+            <a:r>
+              <a:rPr lang="zh-CN" sz="1056" dirty="0">
+                <a:solidFill>
+                  <a:srgbClr val="1A1A18"/>
+                </a:solidFill>
+                <a:latin typeface="Noto Sans Mono CJK SC"/>
+                <a:ea typeface="Noto Sans Mono CJK SC"/>
+                <a:cs typeface="Noto Sans Mono CJK SC"/>
+              </a:rPr>
+              <a:t> (weight &gt;= infinity) {  </a:t>
+            </a:r>
+            <a:r>
+              <a:rPr lang="zh-CN" sz="1056" dirty="0">
+                <a:solidFill>
+                  <a:srgbClr val="8A8A84"/>
+                </a:solidFill>
+                <a:latin typeface="Noto Sans Mono CJK SC"/>
+                <a:ea typeface="Noto Sans Mono CJK SC"/>
+                <a:cs typeface="Noto Sans Mono CJK SC"/>
+              </a:rPr>
+              <a:t>// infinity 表示「无边」，这么大的权存进去就被当成没有边</a:t>
+            </a:r>
+          </a:p>
+          <a:p>
+            <a:pPr marL="0" indent="0" lvl="0">
+              <a:lnSpc>
+                <a:spcPct val="104000"/>
+              </a:lnSpc>
+              <a:buNone/>
+            </a:pPr>
+            <a:r>
+              <a:rPr lang="zh-CN" sz="1056" dirty="0">
+                <a:solidFill>
+                  <a:srgbClr val="1A1A18"/>
+                </a:solidFill>
+                <a:latin typeface="Noto Sans Mono CJK SC"/>
+                <a:ea typeface="Noto Sans Mono CJK SC"/>
+                <a:cs typeface="Noto Sans Mono CJK SC"/>
+              </a:rPr>
+              <a:t>        </a:t>
+            </a:r>
+            <a:r>
+              <a:rPr lang="zh-CN" sz="1056" dirty="0">
+                <a:solidFill>
+                  <a:srgbClr val="8A4B2A"/>
+                </a:solidFill>
+                <a:latin typeface="Noto Sans Mono CJK SC"/>
+                <a:ea typeface="Noto Sans Mono CJK SC"/>
+                <a:cs typeface="Noto Sans Mono CJK SC"/>
+              </a:rPr>
+              <a:t>throw</a:t>
+            </a:r>
+            <a:r>
+              <a:rPr lang="zh-CN" sz="1056" dirty="0">
+                <a:solidFill>
+                  <a:srgbClr val="1A1A18"/>
+                </a:solidFill>
+                <a:latin typeface="Noto Sans Mono CJK SC"/>
+                <a:ea typeface="Noto Sans Mono CJK SC"/>
+                <a:cs typeface="Noto Sans Mono CJK SC"/>
+              </a:rPr>
+              <a:t> std::invalid_argument(</a:t>
+            </a:r>
+            <a:r>
+              <a:rPr lang="zh-CN" sz="1056" dirty="0">
+                <a:solidFill>
+                  <a:srgbClr val="7A5C1E"/>
+                </a:solidFill>
+                <a:latin typeface="Noto Sans Mono CJK SC"/>
+                <a:ea typeface="Noto Sans Mono CJK SC"/>
+                <a:cs typeface="Noto Sans Mono CJK SC"/>
+              </a:rPr>
+              <a:t>"edge weight must be below Graph::infinity"</a:t>
+            </a:r>
+            <a:r>
+              <a:rPr lang="zh-CN" sz="1056" dirty="0">
+                <a:solidFill>
+                  <a:srgbClr val="1A1A18"/>
+                </a:solidFill>
+                <a:latin typeface="Noto Sans Mono CJK SC"/>
+                <a:ea typeface="Noto Sans Mono CJK SC"/>
+                <a:cs typeface="Noto Sans Mono CJK SC"/>
+              </a:rPr>
+              <a:t>);</a:t>
+            </a:r>
+          </a:p>
+          <a:p>
+            <a:pPr marL="0" indent="0" lvl="0">
+              <a:lnSpc>
+                <a:spcPct val="104000"/>
+              </a:lnSpc>
+              <a:buNone/>
+            </a:pPr>
+            <a:r>
+              <a:rPr lang="zh-CN" sz="1056" dirty="0">
+                <a:solidFill>
+                  <a:srgbClr val="1A1A18"/>
+                </a:solidFill>
+                <a:latin typeface="Noto Sans Mono CJK SC"/>
+                <a:ea typeface="Noto Sans Mono CJK SC"/>
+                <a:cs typeface="Noto Sans Mono CJK SC"/>
+              </a:rPr>
+              <a:t>    }</a:t>
+            </a:r>
+          </a:p>
+          <a:p>
+            <a:pPr marL="0" indent="0" lvl="0">
+              <a:lnSpc>
+                <a:spcPct val="104000"/>
+              </a:lnSpc>
+              <a:buNone/>
+            </a:pPr>
+            <a:r>
+              <a:rPr lang="zh-CN" sz="1056" dirty="0">
                 <a:solidFill>
                   <a:srgbClr val="1A1A18"/>
                 </a:solidFill>
@@ -18669,7 +18803,7 @@
               <a:buNone/>
             </a:pPr>
             <a:r>
-              <a:rPr lang="zh-CN" sz="1128" dirty="0">
+              <a:rPr lang="zh-CN" sz="1056" dirty="0">
                 <a:solidFill>
                   <a:srgbClr val="1A1A18"/>
                 </a:solidFill>
@@ -18680,7 +18814,7 @@
               <a:t>    </a:t>
             </a:r>
             <a:r>
-              <a:rPr lang="zh-CN" sz="1128" dirty="0">
+              <a:rPr lang="zh-CN" sz="1056" dirty="0">
                 <a:solidFill>
                   <a:srgbClr val="8A4B2A"/>
                 </a:solidFill>
@@ -18691,7 +18825,7 @@
               <a:t>if</a:t>
             </a:r>
             <a:r>
-              <a:rPr lang="zh-CN" sz="1128" dirty="0">
+              <a:rPr lang="zh-CN" sz="1056" dirty="0">
                 <a:solidFill>
                   <a:srgbClr val="1A1A18"/>
                 </a:solidFill>
@@ -18710,7 +18844,7 @@
               <a:buNone/>
             </a:pPr>
             <a:r>
-              <a:rPr lang="zh-CN" sz="1128" dirty="0">
+              <a:rPr lang="zh-CN" sz="1056" dirty="0">
                 <a:solidFill>
                   <a:srgbClr val="1A1A18"/>
                 </a:solidFill>
@@ -18729,7 +18863,7 @@
               <a:buNone/>
             </a:pPr>
             <a:r>
-              <a:rPr lang="zh-CN" sz="1128" dirty="0">
+              <a:rPr lang="zh-CN" sz="1056" dirty="0">
                 <a:solidFill>
                   <a:srgbClr val="1A1A18"/>
                 </a:solidFill>
@@ -18748,7 +18882,7 @@
               <a:buNone/>
             </a:pPr>
             <a:r>
-              <a:rPr lang="zh-CN" sz="1128" dirty="0">
+              <a:rPr lang="zh-CN" sz="1056" dirty="0">
                 <a:solidFill>
                   <a:srgbClr val="1A1A18"/>
                 </a:solidFill>

--- a/book/slides/pptx/ch07-graph.pptx
+++ b/book/slides/pptx/ch07-graph.pptx
@@ -865,7 +865,7 @@
                 <a:ea typeface="Noto Sans CJK SC"/>
                 <a:cs typeface="Segoe UI"/>
               </a:rPr>
-              <a:t>infinity 取 INT_MAX/4 而不是 INT_MAX——Floyd 里两个 infinity 会相加，</a:t>
+              <a:t>infinity 在矩阵里只表示「无边」，边权必须小于它（add_edge 会拒绝）。</a:t>
             </a:r>
           </a:p>
           <a:p>
@@ -884,7 +884,26 @@
                 <a:ea typeface="Noto Sans CJK SC"/>
                 <a:cs typeface="Segoe UI"/>
               </a:rPr>
-              <a:t>用 INT_MAX 就溢出了，而有符号溢出是未定义行为。这一处第 1 章也讲过。</a:t>
+              <a:t>路径长度是若干条边之和，Dijkstra/Floyd 用 64 位的 distance_type 存，到不了记 unreachable——</a:t>
+            </a:r>
+          </a:p>
+          <a:p>
+            <a:pPr marL="0" indent="0" lvl="0">
+              <a:lnSpc>
+                <a:spcPct val="100000"/>
+              </a:lnSpc>
+              <a:buNone/>
+            </a:pPr>
+            <a:r>
+              <a:rPr lang="zh-CN" sz="1200" dirty="0">
+                <a:solidFill>
+                  <a:srgbClr val="1A1A18"/>
+                </a:solidFill>
+                <a:latin typeface="Segoe UI"/>
+                <a:ea typeface="Noto Sans CJK SC"/>
+                <a:cs typeface="Segoe UI"/>
+              </a:rPr>
+              <a:t>否则总长恰为 infinity 的路径会被读成到不了，更长的还会溢出。这一处第 1 章也讲过。</a:t>
             </a:r>
           </a:p>
           <a:p>
@@ -6451,7 +6470,7 @@
                 <a:ea typeface="Noto Sans Mono CJK SC"/>
                 <a:cs typeface="Noto Sans Mono CJK SC"/>
               </a:rPr>
-              <a:t>[[nodiscard]] std::vector&lt;</a:t>
+              <a:t>[[nodiscard]] std::vector&lt;distance_type&gt; dijkstra(std::</a:t>
             </a:r>
             <a:r>
               <a:rPr lang="zh-CN" sz="1200" dirty="0">
@@ -6462,7 +6481,7 @@
                 <a:ea typeface="Noto Sans Mono CJK SC"/>
                 <a:cs typeface="Noto Sans Mono CJK SC"/>
               </a:rPr>
-              <a:t>int</a:t>
+              <a:t>size_t</a:t>
             </a:r>
             <a:r>
               <a:rPr lang="zh-CN" sz="1200" dirty="0">
@@ -6473,17 +6492,200 @@
                 <a:ea typeface="Noto Sans Mono CJK SC"/>
                 <a:cs typeface="Noto Sans Mono CJK SC"/>
               </a:rPr>
-              <a:t>&gt; dijkstra(std::</a:t>
+              <a:t> source) </a:t>
             </a:r>
             <a:r>
               <a:rPr lang="zh-CN" sz="1200" dirty="0">
                 <a:solidFill>
+                  <a:srgbClr val="8A4B2A"/>
+                </a:solidFill>
+                <a:latin typeface="Noto Sans Mono CJK SC"/>
+                <a:ea typeface="Noto Sans Mono CJK SC"/>
+                <a:cs typeface="Noto Sans Mono CJK SC"/>
+              </a:rPr>
+              <a:t>const</a:t>
+            </a:r>
+            <a:r>
+              <a:rPr lang="zh-CN" sz="1200" dirty="0">
+                <a:solidFill>
+                  <a:srgbClr val="1A1A18"/>
+                </a:solidFill>
+                <a:latin typeface="Noto Sans Mono CJK SC"/>
+                <a:ea typeface="Noto Sans Mono CJK SC"/>
+                <a:cs typeface="Noto Sans Mono CJK SC"/>
+              </a:rPr>
+              <a:t> {</a:t>
+            </a:r>
+          </a:p>
+          <a:p>
+            <a:pPr marL="0" indent="0" lvl="0">
+              <a:lnSpc>
+                <a:spcPct val="104000"/>
+              </a:lnSpc>
+              <a:buNone/>
+            </a:pPr>
+            <a:r>
+              <a:rPr lang="zh-CN" sz="1200" dirty="0">
+                <a:solidFill>
+                  <a:srgbClr val="1A1A18"/>
+                </a:solidFill>
+                <a:latin typeface="Noto Sans Mono CJK SC"/>
+                <a:ea typeface="Noto Sans Mono CJK SC"/>
+                <a:cs typeface="Noto Sans Mono CJK SC"/>
+              </a:rPr>
+              <a:t>    check_vertex(source);</a:t>
+            </a:r>
+          </a:p>
+          <a:p>
+            <a:pPr marL="0" indent="0" lvl="0">
+              <a:lnSpc>
+                <a:spcPct val="104000"/>
+              </a:lnSpc>
+              <a:buNone/>
+            </a:pPr>
+            <a:r>
+              <a:rPr lang="zh-CN" sz="1200" dirty="0">
+                <a:solidFill>
+                  <a:srgbClr val="1A1A18"/>
+                </a:solidFill>
+                <a:latin typeface="Noto Sans Mono CJK SC"/>
+                <a:ea typeface="Noto Sans Mono CJK SC"/>
+                <a:cs typeface="Noto Sans Mono CJK SC"/>
+              </a:rPr>
+              <a:t>    std::vector&lt;distance_type&gt; distance(vertices(), unreachable);</a:t>
+            </a:r>
+          </a:p>
+          <a:p>
+            <a:pPr marL="0" indent="0" lvl="0">
+              <a:lnSpc>
+                <a:spcPct val="104000"/>
+              </a:lnSpc>
+              <a:buNone/>
+            </a:pPr>
+            <a:r>
+              <a:rPr lang="zh-CN" sz="1200" dirty="0">
+                <a:solidFill>
+                  <a:srgbClr val="1A1A18"/>
+                </a:solidFill>
+                <a:latin typeface="Noto Sans Mono CJK SC"/>
+                <a:ea typeface="Noto Sans Mono CJK SC"/>
+                <a:cs typeface="Noto Sans Mono CJK SC"/>
+              </a:rPr>
+              <a:t>    std::vector&lt;</a:t>
+            </a:r>
+            <a:r>
+              <a:rPr lang="zh-CN" sz="1200" dirty="0">
+                <a:solidFill>
                   <a:srgbClr val="2C6B57"/>
                 </a:solidFill>
                 <a:latin typeface="Noto Sans Mono CJK SC"/>
                 <a:ea typeface="Noto Sans Mono CJK SC"/>
                 <a:cs typeface="Noto Sans Mono CJK SC"/>
               </a:rPr>
+              <a:t>bool</a:t>
+            </a:r>
+            <a:r>
+              <a:rPr lang="zh-CN" sz="1200" dirty="0">
+                <a:solidFill>
+                  <a:srgbClr val="1A1A18"/>
+                </a:solidFill>
+                <a:latin typeface="Noto Sans Mono CJK SC"/>
+                <a:ea typeface="Noto Sans Mono CJK SC"/>
+                <a:cs typeface="Noto Sans Mono CJK SC"/>
+              </a:rPr>
+              <a:t>&gt; used(vertices());</a:t>
+            </a:r>
+          </a:p>
+          <a:p>
+            <a:pPr marL="0" indent="0" lvl="0">
+              <a:lnSpc>
+                <a:spcPct val="104000"/>
+              </a:lnSpc>
+              <a:buNone/>
+            </a:pPr>
+            <a:r>
+              <a:rPr lang="zh-CN" sz="1200" dirty="0">
+                <a:solidFill>
+                  <a:srgbClr val="1A1A18"/>
+                </a:solidFill>
+                <a:latin typeface="Noto Sans Mono CJK SC"/>
+                <a:ea typeface="Noto Sans Mono CJK SC"/>
+                <a:cs typeface="Noto Sans Mono CJK SC"/>
+              </a:rPr>
+              <a:t>    distance[source] = </a:t>
+            </a:r>
+            <a:r>
+              <a:rPr lang="zh-CN" sz="1200" dirty="0">
+                <a:solidFill>
+                  <a:srgbClr val="4A5AA8"/>
+                </a:solidFill>
+                <a:latin typeface="Noto Sans Mono CJK SC"/>
+                <a:ea typeface="Noto Sans Mono CJK SC"/>
+                <a:cs typeface="Noto Sans Mono CJK SC"/>
+              </a:rPr>
+              <a:t>0</a:t>
+            </a:r>
+            <a:r>
+              <a:rPr lang="zh-CN" sz="1200" dirty="0">
+                <a:solidFill>
+                  <a:srgbClr val="1A1A18"/>
+                </a:solidFill>
+                <a:latin typeface="Noto Sans Mono CJK SC"/>
+                <a:ea typeface="Noto Sans Mono CJK SC"/>
+                <a:cs typeface="Noto Sans Mono CJK SC"/>
+              </a:rPr>
+              <a:t>;</a:t>
+            </a:r>
+          </a:p>
+          <a:p>
+            <a:pPr marL="0" indent="0" lvl="0">
+              <a:lnSpc>
+                <a:spcPct val="104000"/>
+              </a:lnSpc>
+              <a:buNone/>
+            </a:pPr>
+            <a:r>
+              <a:rPr lang="zh-CN" sz="1200" dirty="0">
+                <a:solidFill>
+                  <a:srgbClr val="1A1A18"/>
+                </a:solidFill>
+                <a:latin typeface="Noto Sans Mono CJK SC"/>
+                <a:ea typeface="Noto Sans Mono CJK SC"/>
+                <a:cs typeface="Noto Sans Mono CJK SC"/>
+              </a:rPr>
+              <a:t>    </a:t>
+            </a:r>
+            <a:r>
+              <a:rPr lang="zh-CN" sz="1200" dirty="0">
+                <a:solidFill>
+                  <a:srgbClr val="8A4B2A"/>
+                </a:solidFill>
+                <a:latin typeface="Noto Sans Mono CJK SC"/>
+                <a:ea typeface="Noto Sans Mono CJK SC"/>
+                <a:cs typeface="Noto Sans Mono CJK SC"/>
+              </a:rPr>
+              <a:t>for</a:t>
+            </a:r>
+            <a:r>
+              <a:rPr lang="zh-CN" sz="1200" dirty="0">
+                <a:solidFill>
+                  <a:srgbClr val="1A1A18"/>
+                </a:solidFill>
+                <a:latin typeface="Noto Sans Mono CJK SC"/>
+                <a:ea typeface="Noto Sans Mono CJK SC"/>
+                <a:cs typeface="Noto Sans Mono CJK SC"/>
+              </a:rPr>
+              <a:t> (std::</a:t>
+            </a:r>
+            <a:r>
+              <a:rPr lang="zh-CN" sz="1200" dirty="0">
+                <a:solidFill>
+                  <a:srgbClr val="2C6B57"/>
+                </a:solidFill>
+                <a:latin typeface="Noto Sans Mono CJK SC"/>
+                <a:ea typeface="Noto Sans Mono CJK SC"/>
+                <a:cs typeface="Noto Sans Mono CJK SC"/>
+              </a:rPr>
               <a:t>size_t</a:t>
             </a:r>
             <a:r>
@@ -6495,11 +6697,52 @@
                 <a:ea typeface="Noto Sans Mono CJK SC"/>
                 <a:cs typeface="Noto Sans Mono CJK SC"/>
               </a:rPr>
-              <a:t> source) </a:t>
+              <a:t> count = </a:t>
             </a:r>
             <a:r>
               <a:rPr lang="zh-CN" sz="1200" dirty="0">
                 <a:solidFill>
+                  <a:srgbClr val="4A5AA8"/>
+                </a:solidFill>
+                <a:latin typeface="Noto Sans Mono CJK SC"/>
+                <a:ea typeface="Noto Sans Mono CJK SC"/>
+                <a:cs typeface="Noto Sans Mono CJK SC"/>
+              </a:rPr>
+              <a:t>0</a:t>
+            </a:r>
+            <a:r>
+              <a:rPr lang="zh-CN" sz="1200" dirty="0">
+                <a:solidFill>
+                  <a:srgbClr val="1A1A18"/>
+                </a:solidFill>
+                <a:latin typeface="Noto Sans Mono CJK SC"/>
+                <a:ea typeface="Noto Sans Mono CJK SC"/>
+                <a:cs typeface="Noto Sans Mono CJK SC"/>
+              </a:rPr>
+              <a:t>; count &lt; vertices(); ++count) {</a:t>
+            </a:r>
+          </a:p>
+          <a:p>
+            <a:pPr marL="0" indent="0" lvl="0">
+              <a:lnSpc>
+                <a:spcPct val="104000"/>
+              </a:lnSpc>
+              <a:buNone/>
+            </a:pPr>
+            <a:r>
+              <a:rPr lang="zh-CN" sz="1200" dirty="0">
+                <a:solidFill>
+                  <a:srgbClr val="1A1A18"/>
+                </a:solidFill>
+                <a:latin typeface="Noto Sans Mono CJK SC"/>
+                <a:ea typeface="Noto Sans Mono CJK SC"/>
+                <a:cs typeface="Noto Sans Mono CJK SC"/>
+              </a:rPr>
+              <a:t>        </a:t>
+            </a:r>
+            <a:r>
+              <a:rPr lang="zh-CN" sz="1200" dirty="0">
+                <a:solidFill>
                   <a:srgbClr val="8A4B2A"/>
                 </a:solidFill>
                 <a:latin typeface="Noto Sans Mono CJK SC"/>
@@ -6517,7 +6760,29 @@
                 <a:ea typeface="Noto Sans Mono CJK SC"/>
                 <a:cs typeface="Noto Sans Mono CJK SC"/>
               </a:rPr>
-              <a:t> {</a:t>
+              <a:t> std::</a:t>
+            </a:r>
+            <a:r>
+              <a:rPr lang="zh-CN" sz="1200" dirty="0">
+                <a:solidFill>
+                  <a:srgbClr val="2C6B57"/>
+                </a:solidFill>
+                <a:latin typeface="Noto Sans Mono CJK SC"/>
+                <a:ea typeface="Noto Sans Mono CJK SC"/>
+                <a:cs typeface="Noto Sans Mono CJK SC"/>
+              </a:rPr>
+              <a:t>size_t</a:t>
+            </a:r>
+            <a:r>
+              <a:rPr lang="zh-CN" sz="1200" dirty="0">
+                <a:solidFill>
+                  <a:srgbClr val="1A1A18"/>
+                </a:solidFill>
+                <a:latin typeface="Noto Sans Mono CJK SC"/>
+                <a:ea typeface="Noto Sans Mono CJK SC"/>
+                <a:cs typeface="Noto Sans Mono CJK SC"/>
+              </a:rPr>
+              <a:t> from = nearest_unvisited(distance, used);</a:t>
             </a:r>
           </a:p>
           <a:p>
@@ -6536,319 +6801,29 @@
                 <a:ea typeface="Noto Sans Mono CJK SC"/>
                 <a:cs typeface="Noto Sans Mono CJK SC"/>
               </a:rPr>
-              <a:t>    check_vertex(source);</a:t>
-            </a:r>
-          </a:p>
-          <a:p>
-            <a:pPr marL="0" indent="0" lvl="0">
-              <a:lnSpc>
-                <a:spcPct val="104000"/>
-              </a:lnSpc>
-              <a:buNone/>
-            </a:pPr>
+              <a:t>        </a:t>
+            </a:r>
             <a:r>
               <a:rPr lang="zh-CN" sz="1200" dirty="0">
                 <a:solidFill>
-                  <a:srgbClr val="1A1A18"/>
-                </a:solidFill>
-                <a:latin typeface="Noto Sans Mono CJK SC"/>
-                <a:ea typeface="Noto Sans Mono CJK SC"/>
-                <a:cs typeface="Noto Sans Mono CJK SC"/>
-              </a:rPr>
-              <a:t>    std::vector&lt;</a:t>
+                  <a:srgbClr val="8A4B2A"/>
+                </a:solidFill>
+                <a:latin typeface="Noto Sans Mono CJK SC"/>
+                <a:ea typeface="Noto Sans Mono CJK SC"/>
+                <a:cs typeface="Noto Sans Mono CJK SC"/>
+              </a:rPr>
+              <a:t>if</a:t>
             </a:r>
             <a:r>
               <a:rPr lang="zh-CN" sz="1200" dirty="0">
                 <a:solidFill>
-                  <a:srgbClr val="2C6B57"/>
-                </a:solidFill>
-                <a:latin typeface="Noto Sans Mono CJK SC"/>
-                <a:ea typeface="Noto Sans Mono CJK SC"/>
-                <a:cs typeface="Noto Sans Mono CJK SC"/>
-              </a:rPr>
-              <a:t>int</a:t>
-            </a:r>
-            <a:r>
-              <a:rPr lang="zh-CN" sz="1200" dirty="0">
-                <a:solidFill>
-                  <a:srgbClr val="1A1A18"/>
-                </a:solidFill>
-                <a:latin typeface="Noto Sans Mono CJK SC"/>
-                <a:ea typeface="Noto Sans Mono CJK SC"/>
-                <a:cs typeface="Noto Sans Mono CJK SC"/>
-              </a:rPr>
-              <a:t>&gt; distance(vertices(), infinity);</a:t>
-            </a:r>
-          </a:p>
-          <a:p>
-            <a:pPr marL="0" indent="0" lvl="0">
-              <a:lnSpc>
-                <a:spcPct val="104000"/>
-              </a:lnSpc>
-              <a:buNone/>
-            </a:pPr>
-            <a:r>
-              <a:rPr lang="zh-CN" sz="1200" dirty="0">
-                <a:solidFill>
-                  <a:srgbClr val="1A1A18"/>
-                </a:solidFill>
-                <a:latin typeface="Noto Sans Mono CJK SC"/>
-                <a:ea typeface="Noto Sans Mono CJK SC"/>
-                <a:cs typeface="Noto Sans Mono CJK SC"/>
-              </a:rPr>
-              <a:t>    std::vector&lt;</a:t>
-            </a:r>
-            <a:r>
-              <a:rPr lang="zh-CN" sz="1200" dirty="0">
-                <a:solidFill>
-                  <a:srgbClr val="2C6B57"/>
-                </a:solidFill>
-                <a:latin typeface="Noto Sans Mono CJK SC"/>
-                <a:ea typeface="Noto Sans Mono CJK SC"/>
-                <a:cs typeface="Noto Sans Mono CJK SC"/>
-              </a:rPr>
-              <a:t>bool</a:t>
-            </a:r>
-            <a:r>
-              <a:rPr lang="zh-CN" sz="1200" dirty="0">
-                <a:solidFill>
-                  <a:srgbClr val="1A1A18"/>
-                </a:solidFill>
-                <a:latin typeface="Noto Sans Mono CJK SC"/>
-                <a:ea typeface="Noto Sans Mono CJK SC"/>
-                <a:cs typeface="Noto Sans Mono CJK SC"/>
-              </a:rPr>
-              <a:t>&gt; used(vertices());</a:t>
-            </a:r>
-          </a:p>
-          <a:p>
-            <a:pPr marL="0" indent="0" lvl="0">
-              <a:lnSpc>
-                <a:spcPct val="104000"/>
-              </a:lnSpc>
-              <a:buNone/>
-            </a:pPr>
-            <a:r>
-              <a:rPr lang="zh-CN" sz="1200" dirty="0">
-                <a:solidFill>
-                  <a:srgbClr val="1A1A18"/>
-                </a:solidFill>
-                <a:latin typeface="Noto Sans Mono CJK SC"/>
-                <a:ea typeface="Noto Sans Mono CJK SC"/>
-                <a:cs typeface="Noto Sans Mono CJK SC"/>
-              </a:rPr>
-              <a:t>    distance[source] = </a:t>
-            </a:r>
-            <a:r>
-              <a:rPr lang="zh-CN" sz="1200" dirty="0">
-                <a:solidFill>
-                  <a:srgbClr val="4A5AA8"/>
-                </a:solidFill>
-                <a:latin typeface="Noto Sans Mono CJK SC"/>
-                <a:ea typeface="Noto Sans Mono CJK SC"/>
-                <a:cs typeface="Noto Sans Mono CJK SC"/>
-              </a:rPr>
-              <a:t>0</a:t>
-            </a:r>
-            <a:r>
-              <a:rPr lang="zh-CN" sz="1200" dirty="0">
-                <a:solidFill>
-                  <a:srgbClr val="1A1A18"/>
-                </a:solidFill>
-                <a:latin typeface="Noto Sans Mono CJK SC"/>
-                <a:ea typeface="Noto Sans Mono CJK SC"/>
-                <a:cs typeface="Noto Sans Mono CJK SC"/>
-              </a:rPr>
-              <a:t>;</a:t>
-            </a:r>
-          </a:p>
-          <a:p>
-            <a:pPr marL="0" indent="0" lvl="0">
-              <a:lnSpc>
-                <a:spcPct val="104000"/>
-              </a:lnSpc>
-              <a:buNone/>
-            </a:pPr>
-            <a:r>
-              <a:rPr lang="zh-CN" sz="1200" dirty="0">
-                <a:solidFill>
-                  <a:srgbClr val="1A1A18"/>
-                </a:solidFill>
-                <a:latin typeface="Noto Sans Mono CJK SC"/>
-                <a:ea typeface="Noto Sans Mono CJK SC"/>
-                <a:cs typeface="Noto Sans Mono CJK SC"/>
-              </a:rPr>
-              <a:t>    </a:t>
-            </a:r>
-            <a:r>
-              <a:rPr lang="zh-CN" sz="1200" dirty="0">
-                <a:solidFill>
-                  <a:srgbClr val="8A4B2A"/>
-                </a:solidFill>
-                <a:latin typeface="Noto Sans Mono CJK SC"/>
-                <a:ea typeface="Noto Sans Mono CJK SC"/>
-                <a:cs typeface="Noto Sans Mono CJK SC"/>
-              </a:rPr>
-              <a:t>for</a:t>
-            </a:r>
-            <a:r>
-              <a:rPr lang="zh-CN" sz="1200" dirty="0">
-                <a:solidFill>
-                  <a:srgbClr val="1A1A18"/>
-                </a:solidFill>
-                <a:latin typeface="Noto Sans Mono CJK SC"/>
-                <a:ea typeface="Noto Sans Mono CJK SC"/>
-                <a:cs typeface="Noto Sans Mono CJK SC"/>
-              </a:rPr>
-              <a:t> (std::</a:t>
-            </a:r>
-            <a:r>
-              <a:rPr lang="zh-CN" sz="1200" dirty="0">
-                <a:solidFill>
-                  <a:srgbClr val="2C6B57"/>
-                </a:solidFill>
-                <a:latin typeface="Noto Sans Mono CJK SC"/>
-                <a:ea typeface="Noto Sans Mono CJK SC"/>
-                <a:cs typeface="Noto Sans Mono CJK SC"/>
-              </a:rPr>
-              <a:t>size_t</a:t>
-            </a:r>
-            <a:r>
-              <a:rPr lang="zh-CN" sz="1200" dirty="0">
-                <a:solidFill>
-                  <a:srgbClr val="1A1A18"/>
-                </a:solidFill>
-                <a:latin typeface="Noto Sans Mono CJK SC"/>
-                <a:ea typeface="Noto Sans Mono CJK SC"/>
-                <a:cs typeface="Noto Sans Mono CJK SC"/>
-              </a:rPr>
-              <a:t> count = </a:t>
-            </a:r>
-            <a:r>
-              <a:rPr lang="zh-CN" sz="1200" dirty="0">
-                <a:solidFill>
-                  <a:srgbClr val="4A5AA8"/>
-                </a:solidFill>
-                <a:latin typeface="Noto Sans Mono CJK SC"/>
-                <a:ea typeface="Noto Sans Mono CJK SC"/>
-                <a:cs typeface="Noto Sans Mono CJK SC"/>
-              </a:rPr>
-              <a:t>0</a:t>
-            </a:r>
-            <a:r>
-              <a:rPr lang="zh-CN" sz="1200" dirty="0">
-                <a:solidFill>
-                  <a:srgbClr val="1A1A18"/>
-                </a:solidFill>
-                <a:latin typeface="Noto Sans Mono CJK SC"/>
-                <a:ea typeface="Noto Sans Mono CJK SC"/>
-                <a:cs typeface="Noto Sans Mono CJK SC"/>
-              </a:rPr>
-              <a:t>; count &lt; vertices(); ++count) {</a:t>
-            </a:r>
-          </a:p>
-          <a:p>
-            <a:pPr marL="0" indent="0" lvl="0">
-              <a:lnSpc>
-                <a:spcPct val="104000"/>
-              </a:lnSpc>
-              <a:buNone/>
-            </a:pPr>
-            <a:r>
-              <a:rPr lang="zh-CN" sz="1200" dirty="0">
-                <a:solidFill>
-                  <a:srgbClr val="1A1A18"/>
-                </a:solidFill>
-                <a:latin typeface="Noto Sans Mono CJK SC"/>
-                <a:ea typeface="Noto Sans Mono CJK SC"/>
-                <a:cs typeface="Noto Sans Mono CJK SC"/>
-              </a:rPr>
-              <a:t>        </a:t>
-            </a:r>
-            <a:r>
-              <a:rPr lang="zh-CN" sz="1200" dirty="0">
-                <a:solidFill>
-                  <a:srgbClr val="8A4B2A"/>
-                </a:solidFill>
-                <a:latin typeface="Noto Sans Mono CJK SC"/>
-                <a:ea typeface="Noto Sans Mono CJK SC"/>
-                <a:cs typeface="Noto Sans Mono CJK SC"/>
-              </a:rPr>
-              <a:t>const</a:t>
-            </a:r>
-            <a:r>
-              <a:rPr lang="zh-CN" sz="1200" dirty="0">
-                <a:solidFill>
-                  <a:srgbClr val="1A1A18"/>
-                </a:solidFill>
-                <a:latin typeface="Noto Sans Mono CJK SC"/>
-                <a:ea typeface="Noto Sans Mono CJK SC"/>
-                <a:cs typeface="Noto Sans Mono CJK SC"/>
-              </a:rPr>
-              <a:t> std::</a:t>
-            </a:r>
-            <a:r>
-              <a:rPr lang="zh-CN" sz="1200" dirty="0">
-                <a:solidFill>
-                  <a:srgbClr val="2C6B57"/>
-                </a:solidFill>
-                <a:latin typeface="Noto Sans Mono CJK SC"/>
-                <a:ea typeface="Noto Sans Mono CJK SC"/>
-                <a:cs typeface="Noto Sans Mono CJK SC"/>
-              </a:rPr>
-              <a:t>size_t</a:t>
-            </a:r>
-            <a:r>
-              <a:rPr lang="zh-CN" sz="1200" dirty="0">
-                <a:solidFill>
-                  <a:srgbClr val="1A1A18"/>
-                </a:solidFill>
-                <a:latin typeface="Noto Sans Mono CJK SC"/>
-                <a:ea typeface="Noto Sans Mono CJK SC"/>
-                <a:cs typeface="Noto Sans Mono CJK SC"/>
-              </a:rPr>
-              <a:t> from = nearest_unvisited(distance, used);</a:t>
-            </a:r>
-          </a:p>
-          <a:p>
-            <a:pPr marL="0" indent="0" lvl="0">
-              <a:lnSpc>
-                <a:spcPct val="104000"/>
-              </a:lnSpc>
-              <a:buNone/>
-            </a:pPr>
-            <a:r>
-              <a:rPr lang="zh-CN" sz="1200" dirty="0">
-                <a:solidFill>
-                  <a:srgbClr val="1A1A18"/>
-                </a:solidFill>
-                <a:latin typeface="Noto Sans Mono CJK SC"/>
-                <a:ea typeface="Noto Sans Mono CJK SC"/>
-                <a:cs typeface="Noto Sans Mono CJK SC"/>
-              </a:rPr>
-              <a:t>        </a:t>
-            </a:r>
-            <a:r>
-              <a:rPr lang="zh-CN" sz="1200" dirty="0">
-                <a:solidFill>
-                  <a:srgbClr val="8A4B2A"/>
-                </a:solidFill>
-                <a:latin typeface="Noto Sans Mono CJK SC"/>
-                <a:ea typeface="Noto Sans Mono CJK SC"/>
-                <a:cs typeface="Noto Sans Mono CJK SC"/>
-              </a:rPr>
-              <a:t>if</a:t>
-            </a:r>
-            <a:r>
-              <a:rPr lang="zh-CN" sz="1200" dirty="0">
-                <a:solidFill>
-                  <a:srgbClr val="1A1A18"/>
-                </a:solidFill>
-                <a:latin typeface="Noto Sans Mono CJK SC"/>
-                <a:ea typeface="Noto Sans Mono CJK SC"/>
-                <a:cs typeface="Noto Sans Mono CJK SC"/>
-              </a:rPr>
-              <a:t> (from == vertices() || distance[from] == infinity) {</a:t>
+                  <a:srgbClr val="1A1A18"/>
+                </a:solidFill>
+                <a:latin typeface="Noto Sans Mono CJK SC"/>
+                <a:ea typeface="Noto Sans Mono CJK SC"/>
+                <a:cs typeface="Noto Sans Mono CJK SC"/>
+              </a:rPr>
+              <a:t> (from == vertices() || distance[from] == unreachable) {</a:t>
             </a:r>
           </a:p>
           <a:p>
@@ -7471,8 +7446,8 @@
         </p:nvSpPr>
         <p:spPr>
           <a:xfrm>
-            <a:off x="566928" y="1297249"/>
-            <a:ext cx="11058144" cy="3994099"/>
+            <a:off x="566928" y="1217625"/>
+            <a:ext cx="11058144" cy="4396191"/>
           </a:xfrm>
           <a:prstGeom prst="roundRect">
             <a:avLst>
@@ -7501,7 +7476,7 @@
               <a:buNone/>
             </a:pPr>
             <a:r>
-              <a:rPr lang="zh-CN" sz="1141" dirty="0">
+              <a:rPr lang="zh-CN" sz="823" dirty="0">
                 <a:solidFill>
                   <a:srgbClr val="6B6B66"/>
                 </a:solidFill>
@@ -7520,18 +7495,119 @@
               <a:buNone/>
             </a:pPr>
             <a:r>
-              <a:rPr lang="zh-CN" sz="1464" dirty="0">
-                <a:solidFill>
-                  <a:srgbClr val="1A1A18"/>
-                </a:solidFill>
-                <a:latin typeface="Noto Sans Mono CJK SC"/>
-                <a:ea typeface="Noto Sans Mono CJK SC"/>
-                <a:cs typeface="Noto Sans Mono CJK SC"/>
-              </a:rPr>
-              <a:t>[[nodiscard]] std::vector&lt;std::vector&lt;</a:t>
-            </a:r>
-            <a:r>
-              <a:rPr lang="zh-CN" sz="1464" dirty="0">
+              <a:rPr lang="zh-CN" sz="1056" dirty="0">
+                <a:solidFill>
+                  <a:srgbClr val="1A1A18"/>
+                </a:solidFill>
+                <a:latin typeface="Noto Sans Mono CJK SC"/>
+                <a:ea typeface="Noto Sans Mono CJK SC"/>
+                <a:cs typeface="Noto Sans Mono CJK SC"/>
+              </a:rPr>
+              <a:t>[[nodiscard]] std::vector&lt;std::vector&lt;distance_type&gt;&gt; floyd() </a:t>
+            </a:r>
+            <a:r>
+              <a:rPr lang="zh-CN" sz="1056" dirty="0">
+                <a:solidFill>
+                  <a:srgbClr val="8A4B2A"/>
+                </a:solidFill>
+                <a:latin typeface="Noto Sans Mono CJK SC"/>
+                <a:ea typeface="Noto Sans Mono CJK SC"/>
+                <a:cs typeface="Noto Sans Mono CJK SC"/>
+              </a:rPr>
+              <a:t>const</a:t>
+            </a:r>
+            <a:r>
+              <a:rPr lang="zh-CN" sz="1056" dirty="0">
+                <a:solidFill>
+                  <a:srgbClr val="1A1A18"/>
+                </a:solidFill>
+                <a:latin typeface="Noto Sans Mono CJK SC"/>
+                <a:ea typeface="Noto Sans Mono CJK SC"/>
+                <a:cs typeface="Noto Sans Mono CJK SC"/>
+              </a:rPr>
+              <a:t> {</a:t>
+            </a:r>
+          </a:p>
+          <a:p>
+            <a:pPr marL="0" indent="0" lvl="0">
+              <a:lnSpc>
+                <a:spcPct val="104000"/>
+              </a:lnSpc>
+              <a:buNone/>
+            </a:pPr>
+            <a:r>
+              <a:rPr lang="zh-CN" sz="1056" dirty="0">
+                <a:solidFill>
+                  <a:srgbClr val="1A1A18"/>
+                </a:solidFill>
+                <a:latin typeface="Noto Sans Mono CJK SC"/>
+                <a:ea typeface="Noto Sans Mono CJK SC"/>
+                <a:cs typeface="Noto Sans Mono CJK SC"/>
+              </a:rPr>
+              <a:t>    std::vector&lt;std::vector&lt;distance_type&gt;&gt; distance(</a:t>
+            </a:r>
+          </a:p>
+          <a:p>
+            <a:pPr marL="0" indent="0" lvl="0">
+              <a:lnSpc>
+                <a:spcPct val="104000"/>
+              </a:lnSpc>
+              <a:buNone/>
+            </a:pPr>
+            <a:r>
+              <a:rPr lang="zh-CN" sz="1056" dirty="0">
+                <a:solidFill>
+                  <a:srgbClr val="1A1A18"/>
+                </a:solidFill>
+                <a:latin typeface="Noto Sans Mono CJK SC"/>
+                <a:ea typeface="Noto Sans Mono CJK SC"/>
+                <a:cs typeface="Noto Sans Mono CJK SC"/>
+              </a:rPr>
+              <a:t>        vertices(), std::vector&lt;distance_type&gt;(vertices(), unreachable));</a:t>
+            </a:r>
+          </a:p>
+          <a:p>
+            <a:pPr marL="0" indent="0" lvl="0">
+              <a:lnSpc>
+                <a:spcPct val="104000"/>
+              </a:lnSpc>
+              <a:buNone/>
+            </a:pPr>
+            <a:r>
+              <a:rPr lang="zh-CN" sz="1056" dirty="0">
+                <a:solidFill>
+                  <a:srgbClr val="1A1A18"/>
+                </a:solidFill>
+                <a:latin typeface="Noto Sans Mono CJK SC"/>
+                <a:ea typeface="Noto Sans Mono CJK SC"/>
+                <a:cs typeface="Noto Sans Mono CJK SC"/>
+              </a:rPr>
+              <a:t>    </a:t>
+            </a:r>
+            <a:r>
+              <a:rPr lang="zh-CN" sz="1056" dirty="0">
+                <a:solidFill>
+                  <a:srgbClr val="8A4B2A"/>
+                </a:solidFill>
+                <a:latin typeface="Noto Sans Mono CJK SC"/>
+                <a:ea typeface="Noto Sans Mono CJK SC"/>
+                <a:cs typeface="Noto Sans Mono CJK SC"/>
+              </a:rPr>
+              <a:t>for</a:t>
+            </a:r>
+            <a:r>
+              <a:rPr lang="zh-CN" sz="1056" dirty="0">
+                <a:solidFill>
+                  <a:srgbClr val="1A1A18"/>
+                </a:solidFill>
+                <a:latin typeface="Noto Sans Mono CJK SC"/>
+                <a:ea typeface="Noto Sans Mono CJK SC"/>
+                <a:cs typeface="Noto Sans Mono CJK SC"/>
+              </a:rPr>
+              <a:t> (std::</a:t>
+            </a:r>
+            <a:r>
+              <a:rPr lang="zh-CN" sz="1056" dirty="0">
                 <a:solidFill>
                   <a:srgbClr val="2C6B57"/>
                 </a:solidFill>
@@ -7539,21 +7615,62 @@
                 <a:ea typeface="Noto Sans Mono CJK SC"/>
                 <a:cs typeface="Noto Sans Mono CJK SC"/>
               </a:rPr>
-              <a:t>int</a:t>
-            </a:r>
-            <a:r>
-              <a:rPr lang="zh-CN" sz="1464" dirty="0">
-                <a:solidFill>
-                  <a:srgbClr val="1A1A18"/>
-                </a:solidFill>
-                <a:latin typeface="Noto Sans Mono CJK SC"/>
-                <a:ea typeface="Noto Sans Mono CJK SC"/>
-                <a:cs typeface="Noto Sans Mono CJK SC"/>
-              </a:rPr>
-              <a:t>&gt;&gt; floyd() </a:t>
-            </a:r>
-            <a:r>
-              <a:rPr lang="zh-CN" sz="1464" dirty="0">
+              <a:t>size_t</a:t>
+            </a:r>
+            <a:r>
+              <a:rPr lang="zh-CN" sz="1056" dirty="0">
+                <a:solidFill>
+                  <a:srgbClr val="1A1A18"/>
+                </a:solidFill>
+                <a:latin typeface="Noto Sans Mono CJK SC"/>
+                <a:ea typeface="Noto Sans Mono CJK SC"/>
+                <a:cs typeface="Noto Sans Mono CJK SC"/>
+              </a:rPr>
+              <a:t> from = </a:t>
+            </a:r>
+            <a:r>
+              <a:rPr lang="zh-CN" sz="1056" dirty="0">
+                <a:solidFill>
+                  <a:srgbClr val="4A5AA8"/>
+                </a:solidFill>
+                <a:latin typeface="Noto Sans Mono CJK SC"/>
+                <a:ea typeface="Noto Sans Mono CJK SC"/>
+                <a:cs typeface="Noto Sans Mono CJK SC"/>
+              </a:rPr>
+              <a:t>0</a:t>
+            </a:r>
+            <a:r>
+              <a:rPr lang="zh-CN" sz="1056" dirty="0">
+                <a:solidFill>
+                  <a:srgbClr val="1A1A18"/>
+                </a:solidFill>
+                <a:latin typeface="Noto Sans Mono CJK SC"/>
+                <a:ea typeface="Noto Sans Mono CJK SC"/>
+                <a:cs typeface="Noto Sans Mono CJK SC"/>
+              </a:rPr>
+              <a:t>; from &lt; vertices(); ++from) {</a:t>
+            </a:r>
+          </a:p>
+          <a:p>
+            <a:pPr marL="0" indent="0" lvl="0">
+              <a:lnSpc>
+                <a:spcPct val="104000"/>
+              </a:lnSpc>
+              <a:buNone/>
+            </a:pPr>
+            <a:r>
+              <a:rPr lang="zh-CN" sz="1056" dirty="0">
+                <a:solidFill>
+                  <a:srgbClr val="1A1A18"/>
+                </a:solidFill>
+                <a:latin typeface="Noto Sans Mono CJK SC"/>
+                <a:ea typeface="Noto Sans Mono CJK SC"/>
+                <a:cs typeface="Noto Sans Mono CJK SC"/>
+              </a:rPr>
+              <a:t>        </a:t>
+            </a:r>
+            <a:r>
+              <a:rPr lang="zh-CN" sz="1056" dirty="0">
                 <a:solidFill>
                   <a:srgbClr val="8A4B2A"/>
                 </a:solidFill>
@@ -7561,18 +7678,62 @@
                 <a:ea typeface="Noto Sans Mono CJK SC"/>
                 <a:cs typeface="Noto Sans Mono CJK SC"/>
               </a:rPr>
-              <a:t>const</a:t>
-            </a:r>
-            <a:r>
-              <a:rPr lang="zh-CN" sz="1464" dirty="0">
-                <a:solidFill>
-                  <a:srgbClr val="1A1A18"/>
-                </a:solidFill>
-                <a:latin typeface="Noto Sans Mono CJK SC"/>
-                <a:ea typeface="Noto Sans Mono CJK SC"/>
-                <a:cs typeface="Noto Sans Mono CJK SC"/>
-              </a:rPr>
-              <a:t> {</a:t>
+              <a:t>for</a:t>
+            </a:r>
+            <a:r>
+              <a:rPr lang="zh-CN" sz="1056" dirty="0">
+                <a:solidFill>
+                  <a:srgbClr val="1A1A18"/>
+                </a:solidFill>
+                <a:latin typeface="Noto Sans Mono CJK SC"/>
+                <a:ea typeface="Noto Sans Mono CJK SC"/>
+                <a:cs typeface="Noto Sans Mono CJK SC"/>
+              </a:rPr>
+              <a:t> (std::</a:t>
+            </a:r>
+            <a:r>
+              <a:rPr lang="zh-CN" sz="1056" dirty="0">
+                <a:solidFill>
+                  <a:srgbClr val="2C6B57"/>
+                </a:solidFill>
+                <a:latin typeface="Noto Sans Mono CJK SC"/>
+                <a:ea typeface="Noto Sans Mono CJK SC"/>
+                <a:cs typeface="Noto Sans Mono CJK SC"/>
+              </a:rPr>
+              <a:t>size_t</a:t>
+            </a:r>
+            <a:r>
+              <a:rPr lang="zh-CN" sz="1056" dirty="0">
+                <a:solidFill>
+                  <a:srgbClr val="1A1A18"/>
+                </a:solidFill>
+                <a:latin typeface="Noto Sans Mono CJK SC"/>
+                <a:ea typeface="Noto Sans Mono CJK SC"/>
+                <a:cs typeface="Noto Sans Mono CJK SC"/>
+              </a:rPr>
+              <a:t> to = </a:t>
+            </a:r>
+            <a:r>
+              <a:rPr lang="zh-CN" sz="1056" dirty="0">
+                <a:solidFill>
+                  <a:srgbClr val="4A5AA8"/>
+                </a:solidFill>
+                <a:latin typeface="Noto Sans Mono CJK SC"/>
+                <a:ea typeface="Noto Sans Mono CJK SC"/>
+                <a:cs typeface="Noto Sans Mono CJK SC"/>
+              </a:rPr>
+              <a:t>0</a:t>
+            </a:r>
+            <a:r>
+              <a:rPr lang="zh-CN" sz="1056" dirty="0">
+                <a:solidFill>
+                  <a:srgbClr val="1A1A18"/>
+                </a:solidFill>
+                <a:latin typeface="Noto Sans Mono CJK SC"/>
+                <a:ea typeface="Noto Sans Mono CJK SC"/>
+                <a:cs typeface="Noto Sans Mono CJK SC"/>
+              </a:rPr>
+              <a:t>; to &lt; vertices(); ++to) {</a:t>
             </a:r>
           </a:p>
           <a:p>
@@ -7583,7 +7744,124 @@
               <a:buNone/>
             </a:pPr>
             <a:r>
-              <a:rPr lang="zh-CN" sz="1464" dirty="0">
+              <a:rPr lang="zh-CN" sz="1056" dirty="0">
+                <a:solidFill>
+                  <a:srgbClr val="1A1A18"/>
+                </a:solidFill>
+                <a:latin typeface="Noto Sans Mono CJK SC"/>
+                <a:ea typeface="Noto Sans Mono CJK SC"/>
+                <a:cs typeface="Noto Sans Mono CJK SC"/>
+              </a:rPr>
+              <a:t>            </a:t>
+            </a:r>
+            <a:r>
+              <a:rPr lang="zh-CN" sz="1056" dirty="0">
+                <a:solidFill>
+                  <a:srgbClr val="8A4B2A"/>
+                </a:solidFill>
+                <a:latin typeface="Noto Sans Mono CJK SC"/>
+                <a:ea typeface="Noto Sans Mono CJK SC"/>
+                <a:cs typeface="Noto Sans Mono CJK SC"/>
+              </a:rPr>
+              <a:t>if</a:t>
+            </a:r>
+            <a:r>
+              <a:rPr lang="zh-CN" sz="1056" dirty="0">
+                <a:solidFill>
+                  <a:srgbClr val="1A1A18"/>
+                </a:solidFill>
+                <a:latin typeface="Noto Sans Mono CJK SC"/>
+                <a:ea typeface="Noto Sans Mono CJK SC"/>
+                <a:cs typeface="Noto Sans Mono CJK SC"/>
+              </a:rPr>
+              <a:t> (adjacency_[from][to] &lt; infinity) {</a:t>
+            </a:r>
+          </a:p>
+          <a:p>
+            <a:pPr marL="0" indent="0" lvl="0">
+              <a:lnSpc>
+                <a:spcPct val="104000"/>
+              </a:lnSpc>
+              <a:buNone/>
+            </a:pPr>
+            <a:r>
+              <a:rPr lang="zh-CN" sz="1056" dirty="0">
+                <a:solidFill>
+                  <a:srgbClr val="1A1A18"/>
+                </a:solidFill>
+                <a:latin typeface="Noto Sans Mono CJK SC"/>
+                <a:ea typeface="Noto Sans Mono CJK SC"/>
+                <a:cs typeface="Noto Sans Mono CJK SC"/>
+              </a:rPr>
+              <a:t>                distance[from][to] = adjacency_[from][to];</a:t>
+            </a:r>
+          </a:p>
+          <a:p>
+            <a:pPr marL="0" indent="0" lvl="0">
+              <a:lnSpc>
+                <a:spcPct val="104000"/>
+              </a:lnSpc>
+              <a:buNone/>
+            </a:pPr>
+            <a:r>
+              <a:rPr lang="zh-CN" sz="1056" dirty="0">
+                <a:solidFill>
+                  <a:srgbClr val="1A1A18"/>
+                </a:solidFill>
+                <a:latin typeface="Noto Sans Mono CJK SC"/>
+                <a:ea typeface="Noto Sans Mono CJK SC"/>
+                <a:cs typeface="Noto Sans Mono CJK SC"/>
+              </a:rPr>
+              <a:t>            }</a:t>
+            </a:r>
+          </a:p>
+          <a:p>
+            <a:pPr marL="0" indent="0" lvl="0">
+              <a:lnSpc>
+                <a:spcPct val="104000"/>
+              </a:lnSpc>
+              <a:buNone/>
+            </a:pPr>
+            <a:r>
+              <a:rPr lang="zh-CN" sz="1056" dirty="0">
+                <a:solidFill>
+                  <a:srgbClr val="1A1A18"/>
+                </a:solidFill>
+                <a:latin typeface="Noto Sans Mono CJK SC"/>
+                <a:ea typeface="Noto Sans Mono CJK SC"/>
+                <a:cs typeface="Noto Sans Mono CJK SC"/>
+              </a:rPr>
+              <a:t>        }</a:t>
+            </a:r>
+          </a:p>
+          <a:p>
+            <a:pPr marL="0" indent="0" lvl="0">
+              <a:lnSpc>
+                <a:spcPct val="104000"/>
+              </a:lnSpc>
+              <a:buNone/>
+            </a:pPr>
+            <a:r>
+              <a:rPr lang="zh-CN" sz="1056" dirty="0">
+                <a:solidFill>
+                  <a:srgbClr val="1A1A18"/>
+                </a:solidFill>
+                <a:latin typeface="Noto Sans Mono CJK SC"/>
+                <a:ea typeface="Noto Sans Mono CJK SC"/>
+                <a:cs typeface="Noto Sans Mono CJK SC"/>
+              </a:rPr>
+              <a:t>    }</a:t>
+            </a:r>
+          </a:p>
+          <a:p>
+            <a:pPr marL="0" indent="0" lvl="0">
+              <a:lnSpc>
+                <a:spcPct val="104000"/>
+              </a:lnSpc>
+              <a:buNone/>
+            </a:pPr>
+            <a:r>
+              <a:rPr lang="zh-CN" sz="1056" dirty="0">
                 <a:solidFill>
                   <a:srgbClr val="1A1A18"/>
                 </a:solidFill>
@@ -7594,7 +7872,7 @@
               <a:t>    </a:t>
             </a:r>
             <a:r>
-              <a:rPr lang="zh-CN" sz="1464" dirty="0">
+              <a:rPr lang="zh-CN" sz="1056" dirty="0">
                 <a:solidFill>
                   <a:srgbClr val="8A4B2A"/>
                 </a:solidFill>
@@ -7602,18 +7880,62 @@
                 <a:ea typeface="Noto Sans Mono CJK SC"/>
                 <a:cs typeface="Noto Sans Mono CJK SC"/>
               </a:rPr>
-              <a:t>auto</a:t>
-            </a:r>
-            <a:r>
-              <a:rPr lang="zh-CN" sz="1464" dirty="0">
-                <a:solidFill>
-                  <a:srgbClr val="1A1A18"/>
-                </a:solidFill>
-                <a:latin typeface="Noto Sans Mono CJK SC"/>
-                <a:ea typeface="Noto Sans Mono CJK SC"/>
-                <a:cs typeface="Noto Sans Mono CJK SC"/>
-              </a:rPr>
-              <a:t> distance = adjacency_;</a:t>
+              <a:t>for</a:t>
+            </a:r>
+            <a:r>
+              <a:rPr lang="zh-CN" sz="1056" dirty="0">
+                <a:solidFill>
+                  <a:srgbClr val="1A1A18"/>
+                </a:solidFill>
+                <a:latin typeface="Noto Sans Mono CJK SC"/>
+                <a:ea typeface="Noto Sans Mono CJK SC"/>
+                <a:cs typeface="Noto Sans Mono CJK SC"/>
+              </a:rPr>
+              <a:t> (std::</a:t>
+            </a:r>
+            <a:r>
+              <a:rPr lang="zh-CN" sz="1056" dirty="0">
+                <a:solidFill>
+                  <a:srgbClr val="2C6B57"/>
+                </a:solidFill>
+                <a:latin typeface="Noto Sans Mono CJK SC"/>
+                <a:ea typeface="Noto Sans Mono CJK SC"/>
+                <a:cs typeface="Noto Sans Mono CJK SC"/>
+              </a:rPr>
+              <a:t>size_t</a:t>
+            </a:r>
+            <a:r>
+              <a:rPr lang="zh-CN" sz="1056" dirty="0">
+                <a:solidFill>
+                  <a:srgbClr val="1A1A18"/>
+                </a:solidFill>
+                <a:latin typeface="Noto Sans Mono CJK SC"/>
+                <a:ea typeface="Noto Sans Mono CJK SC"/>
+                <a:cs typeface="Noto Sans Mono CJK SC"/>
+              </a:rPr>
+              <a:t> via = </a:t>
+            </a:r>
+            <a:r>
+              <a:rPr lang="zh-CN" sz="1056" dirty="0">
+                <a:solidFill>
+                  <a:srgbClr val="4A5AA8"/>
+                </a:solidFill>
+                <a:latin typeface="Noto Sans Mono CJK SC"/>
+                <a:ea typeface="Noto Sans Mono CJK SC"/>
+                <a:cs typeface="Noto Sans Mono CJK SC"/>
+              </a:rPr>
+              <a:t>0</a:t>
+            </a:r>
+            <a:r>
+              <a:rPr lang="zh-CN" sz="1056" dirty="0">
+                <a:solidFill>
+                  <a:srgbClr val="1A1A18"/>
+                </a:solidFill>
+                <a:latin typeface="Noto Sans Mono CJK SC"/>
+                <a:ea typeface="Noto Sans Mono CJK SC"/>
+                <a:cs typeface="Noto Sans Mono CJK SC"/>
+              </a:rPr>
+              <a:t>; via &lt; vertices(); ++via) {</a:t>
             </a:r>
           </a:p>
           <a:p>
@@ -7624,7 +7946,332 @@
               <a:buNone/>
             </a:pPr>
             <a:r>
-              <a:rPr lang="zh-CN" sz="1464" dirty="0">
+              <a:rPr lang="zh-CN" sz="1056" dirty="0">
+                <a:solidFill>
+                  <a:srgbClr val="1A1A18"/>
+                </a:solidFill>
+                <a:latin typeface="Noto Sans Mono CJK SC"/>
+                <a:ea typeface="Noto Sans Mono CJK SC"/>
+                <a:cs typeface="Noto Sans Mono CJK SC"/>
+              </a:rPr>
+              <a:t>        </a:t>
+            </a:r>
+            <a:r>
+              <a:rPr lang="zh-CN" sz="1056" dirty="0">
+                <a:solidFill>
+                  <a:srgbClr val="8A4B2A"/>
+                </a:solidFill>
+                <a:latin typeface="Noto Sans Mono CJK SC"/>
+                <a:ea typeface="Noto Sans Mono CJK SC"/>
+                <a:cs typeface="Noto Sans Mono CJK SC"/>
+              </a:rPr>
+              <a:t>for</a:t>
+            </a:r>
+            <a:r>
+              <a:rPr lang="zh-CN" sz="1056" dirty="0">
+                <a:solidFill>
+                  <a:srgbClr val="1A1A18"/>
+                </a:solidFill>
+                <a:latin typeface="Noto Sans Mono CJK SC"/>
+                <a:ea typeface="Noto Sans Mono CJK SC"/>
+                <a:cs typeface="Noto Sans Mono CJK SC"/>
+              </a:rPr>
+              <a:t> (std::</a:t>
+            </a:r>
+            <a:r>
+              <a:rPr lang="zh-CN" sz="1056" dirty="0">
+                <a:solidFill>
+                  <a:srgbClr val="2C6B57"/>
+                </a:solidFill>
+                <a:latin typeface="Noto Sans Mono CJK SC"/>
+                <a:ea typeface="Noto Sans Mono CJK SC"/>
+                <a:cs typeface="Noto Sans Mono CJK SC"/>
+              </a:rPr>
+              <a:t>size_t</a:t>
+            </a:r>
+            <a:r>
+              <a:rPr lang="zh-CN" sz="1056" dirty="0">
+                <a:solidFill>
+                  <a:srgbClr val="1A1A18"/>
+                </a:solidFill>
+                <a:latin typeface="Noto Sans Mono CJK SC"/>
+                <a:ea typeface="Noto Sans Mono CJK SC"/>
+                <a:cs typeface="Noto Sans Mono CJK SC"/>
+              </a:rPr>
+              <a:t> from = </a:t>
+            </a:r>
+            <a:r>
+              <a:rPr lang="zh-CN" sz="1056" dirty="0">
+                <a:solidFill>
+                  <a:srgbClr val="4A5AA8"/>
+                </a:solidFill>
+                <a:latin typeface="Noto Sans Mono CJK SC"/>
+                <a:ea typeface="Noto Sans Mono CJK SC"/>
+                <a:cs typeface="Noto Sans Mono CJK SC"/>
+              </a:rPr>
+              <a:t>0</a:t>
+            </a:r>
+            <a:r>
+              <a:rPr lang="zh-CN" sz="1056" dirty="0">
+                <a:solidFill>
+                  <a:srgbClr val="1A1A18"/>
+                </a:solidFill>
+                <a:latin typeface="Noto Sans Mono CJK SC"/>
+                <a:ea typeface="Noto Sans Mono CJK SC"/>
+                <a:cs typeface="Noto Sans Mono CJK SC"/>
+              </a:rPr>
+              <a:t>; from &lt; vertices(); ++from) {</a:t>
+            </a:r>
+          </a:p>
+          <a:p>
+            <a:pPr marL="0" indent="0" lvl="0">
+              <a:lnSpc>
+                <a:spcPct val="104000"/>
+              </a:lnSpc>
+              <a:buNone/>
+            </a:pPr>
+            <a:r>
+              <a:rPr lang="zh-CN" sz="1056" dirty="0">
+                <a:solidFill>
+                  <a:srgbClr val="1A1A18"/>
+                </a:solidFill>
+                <a:latin typeface="Noto Sans Mono CJK SC"/>
+                <a:ea typeface="Noto Sans Mono CJK SC"/>
+                <a:cs typeface="Noto Sans Mono CJK SC"/>
+              </a:rPr>
+              <a:t>            </a:t>
+            </a:r>
+            <a:r>
+              <a:rPr lang="zh-CN" sz="1056" dirty="0">
+                <a:solidFill>
+                  <a:srgbClr val="8A4B2A"/>
+                </a:solidFill>
+                <a:latin typeface="Noto Sans Mono CJK SC"/>
+                <a:ea typeface="Noto Sans Mono CJK SC"/>
+                <a:cs typeface="Noto Sans Mono CJK SC"/>
+              </a:rPr>
+              <a:t>for</a:t>
+            </a:r>
+            <a:r>
+              <a:rPr lang="zh-CN" sz="1056" dirty="0">
+                <a:solidFill>
+                  <a:srgbClr val="1A1A18"/>
+                </a:solidFill>
+                <a:latin typeface="Noto Sans Mono CJK SC"/>
+                <a:ea typeface="Noto Sans Mono CJK SC"/>
+                <a:cs typeface="Noto Sans Mono CJK SC"/>
+              </a:rPr>
+              <a:t> (std::</a:t>
+            </a:r>
+            <a:r>
+              <a:rPr lang="zh-CN" sz="1056" dirty="0">
+                <a:solidFill>
+                  <a:srgbClr val="2C6B57"/>
+                </a:solidFill>
+                <a:latin typeface="Noto Sans Mono CJK SC"/>
+                <a:ea typeface="Noto Sans Mono CJK SC"/>
+                <a:cs typeface="Noto Sans Mono CJK SC"/>
+              </a:rPr>
+              <a:t>size_t</a:t>
+            </a:r>
+            <a:r>
+              <a:rPr lang="zh-CN" sz="1056" dirty="0">
+                <a:solidFill>
+                  <a:srgbClr val="1A1A18"/>
+                </a:solidFill>
+                <a:latin typeface="Noto Sans Mono CJK SC"/>
+                <a:ea typeface="Noto Sans Mono CJK SC"/>
+                <a:cs typeface="Noto Sans Mono CJK SC"/>
+              </a:rPr>
+              <a:t> to = </a:t>
+            </a:r>
+            <a:r>
+              <a:rPr lang="zh-CN" sz="1056" dirty="0">
+                <a:solidFill>
+                  <a:srgbClr val="4A5AA8"/>
+                </a:solidFill>
+                <a:latin typeface="Noto Sans Mono CJK SC"/>
+                <a:ea typeface="Noto Sans Mono CJK SC"/>
+                <a:cs typeface="Noto Sans Mono CJK SC"/>
+              </a:rPr>
+              <a:t>0</a:t>
+            </a:r>
+            <a:r>
+              <a:rPr lang="zh-CN" sz="1056" dirty="0">
+                <a:solidFill>
+                  <a:srgbClr val="1A1A18"/>
+                </a:solidFill>
+                <a:latin typeface="Noto Sans Mono CJK SC"/>
+                <a:ea typeface="Noto Sans Mono CJK SC"/>
+                <a:cs typeface="Noto Sans Mono CJK SC"/>
+              </a:rPr>
+              <a:t>; to &lt; vertices(); ++to) {</a:t>
+            </a:r>
+          </a:p>
+          <a:p>
+            <a:pPr marL="0" indent="0" lvl="0">
+              <a:lnSpc>
+                <a:spcPct val="104000"/>
+              </a:lnSpc>
+              <a:buNone/>
+            </a:pPr>
+            <a:r>
+              <a:rPr lang="zh-CN" sz="1056" dirty="0">
+                <a:solidFill>
+                  <a:srgbClr val="1A1A18"/>
+                </a:solidFill>
+                <a:latin typeface="Noto Sans Mono CJK SC"/>
+                <a:ea typeface="Noto Sans Mono CJK SC"/>
+                <a:cs typeface="Noto Sans Mono CJK SC"/>
+              </a:rPr>
+              <a:t>                </a:t>
+            </a:r>
+            <a:r>
+              <a:rPr lang="zh-CN" sz="1056" dirty="0">
+                <a:solidFill>
+                  <a:srgbClr val="8A4B2A"/>
+                </a:solidFill>
+                <a:latin typeface="Noto Sans Mono CJK SC"/>
+                <a:ea typeface="Noto Sans Mono CJK SC"/>
+                <a:cs typeface="Noto Sans Mono CJK SC"/>
+              </a:rPr>
+              <a:t>if</a:t>
+            </a:r>
+            <a:r>
+              <a:rPr lang="zh-CN" sz="1056" dirty="0">
+                <a:solidFill>
+                  <a:srgbClr val="1A1A18"/>
+                </a:solidFill>
+                <a:latin typeface="Noto Sans Mono CJK SC"/>
+                <a:ea typeface="Noto Sans Mono CJK SC"/>
+                <a:cs typeface="Noto Sans Mono CJK SC"/>
+              </a:rPr>
+              <a:t> (distance[from][via] != unreachable &amp;&amp; distance[via][to] != unreachable) {</a:t>
+            </a:r>
+          </a:p>
+          <a:p>
+            <a:pPr marL="0" indent="0" lvl="0">
+              <a:lnSpc>
+                <a:spcPct val="104000"/>
+              </a:lnSpc>
+              <a:buNone/>
+            </a:pPr>
+            <a:r>
+              <a:rPr lang="zh-CN" sz="1056" dirty="0">
+                <a:solidFill>
+                  <a:srgbClr val="1A1A18"/>
+                </a:solidFill>
+                <a:latin typeface="Noto Sans Mono CJK SC"/>
+                <a:ea typeface="Noto Sans Mono CJK SC"/>
+                <a:cs typeface="Noto Sans Mono CJK SC"/>
+              </a:rPr>
+              <a:t>                    distance[from][to] = std::min(</a:t>
+            </a:r>
+          </a:p>
+          <a:p>
+            <a:pPr marL="0" indent="0" lvl="0">
+              <a:lnSpc>
+                <a:spcPct val="104000"/>
+              </a:lnSpc>
+              <a:buNone/>
+            </a:pPr>
+            <a:r>
+              <a:rPr lang="zh-CN" sz="1056" dirty="0">
+                <a:solidFill>
+                  <a:srgbClr val="1A1A18"/>
+                </a:solidFill>
+                <a:latin typeface="Noto Sans Mono CJK SC"/>
+                <a:ea typeface="Noto Sans Mono CJK SC"/>
+                <a:cs typeface="Noto Sans Mono CJK SC"/>
+              </a:rPr>
+              <a:t>                        distance[from][to], distance[from][via] + distance[via][to]);</a:t>
+            </a:r>
+          </a:p>
+          <a:p>
+            <a:pPr marL="0" indent="0" lvl="0">
+              <a:lnSpc>
+                <a:spcPct val="104000"/>
+              </a:lnSpc>
+              <a:buNone/>
+            </a:pPr>
+            <a:r>
+              <a:rPr lang="zh-CN" sz="1056" dirty="0">
+                <a:solidFill>
+                  <a:srgbClr val="1A1A18"/>
+                </a:solidFill>
+                <a:latin typeface="Noto Sans Mono CJK SC"/>
+                <a:ea typeface="Noto Sans Mono CJK SC"/>
+                <a:cs typeface="Noto Sans Mono CJK SC"/>
+              </a:rPr>
+              <a:t>                }</a:t>
+            </a:r>
+          </a:p>
+          <a:p>
+            <a:pPr marL="0" indent="0" lvl="0">
+              <a:lnSpc>
+                <a:spcPct val="104000"/>
+              </a:lnSpc>
+              <a:buNone/>
+            </a:pPr>
+            <a:r>
+              <a:rPr lang="zh-CN" sz="1056" dirty="0">
+                <a:solidFill>
+                  <a:srgbClr val="1A1A18"/>
+                </a:solidFill>
+                <a:latin typeface="Noto Sans Mono CJK SC"/>
+                <a:ea typeface="Noto Sans Mono CJK SC"/>
+                <a:cs typeface="Noto Sans Mono CJK SC"/>
+              </a:rPr>
+              <a:t>            }</a:t>
+            </a:r>
+          </a:p>
+          <a:p>
+            <a:pPr marL="0" indent="0" lvl="0">
+              <a:lnSpc>
+                <a:spcPct val="104000"/>
+              </a:lnSpc>
+              <a:buNone/>
+            </a:pPr>
+            <a:r>
+              <a:rPr lang="zh-CN" sz="1056" dirty="0">
+                <a:solidFill>
+                  <a:srgbClr val="1A1A18"/>
+                </a:solidFill>
+                <a:latin typeface="Noto Sans Mono CJK SC"/>
+                <a:ea typeface="Noto Sans Mono CJK SC"/>
+                <a:cs typeface="Noto Sans Mono CJK SC"/>
+              </a:rPr>
+              <a:t>        }</a:t>
+            </a:r>
+          </a:p>
+          <a:p>
+            <a:pPr marL="0" indent="0" lvl="0">
+              <a:lnSpc>
+                <a:spcPct val="104000"/>
+              </a:lnSpc>
+              <a:buNone/>
+            </a:pPr>
+            <a:r>
+              <a:rPr lang="zh-CN" sz="1056" dirty="0">
+                <a:solidFill>
+                  <a:srgbClr val="1A1A18"/>
+                </a:solidFill>
+                <a:latin typeface="Noto Sans Mono CJK SC"/>
+                <a:ea typeface="Noto Sans Mono CJK SC"/>
+                <a:cs typeface="Noto Sans Mono CJK SC"/>
+              </a:rPr>
+              <a:t>    }</a:t>
+            </a:r>
+          </a:p>
+          <a:p>
+            <a:pPr marL="0" indent="0" lvl="0">
+              <a:lnSpc>
+                <a:spcPct val="104000"/>
+              </a:lnSpc>
+              <a:buNone/>
+            </a:pPr>
+            <a:r>
+              <a:rPr lang="zh-CN" sz="1056" dirty="0">
                 <a:solidFill>
                   <a:srgbClr val="1A1A18"/>
                 </a:solidFill>
@@ -7635,7 +8282,7 @@
               <a:t>    </a:t>
             </a:r>
             <a:r>
-              <a:rPr lang="zh-CN" sz="1464" dirty="0">
+              <a:rPr lang="zh-CN" sz="1056" dirty="0">
                 <a:solidFill>
                   <a:srgbClr val="8A4B2A"/>
                 </a:solidFill>
@@ -7643,62 +8290,18 @@
                 <a:ea typeface="Noto Sans Mono CJK SC"/>
                 <a:cs typeface="Noto Sans Mono CJK SC"/>
               </a:rPr>
-              <a:t>for</a:t>
-            </a:r>
-            <a:r>
-              <a:rPr lang="zh-CN" sz="1464" dirty="0">
-                <a:solidFill>
-                  <a:srgbClr val="1A1A18"/>
-                </a:solidFill>
-                <a:latin typeface="Noto Sans Mono CJK SC"/>
-                <a:ea typeface="Noto Sans Mono CJK SC"/>
-                <a:cs typeface="Noto Sans Mono CJK SC"/>
-              </a:rPr>
-              <a:t> (std::</a:t>
-            </a:r>
-            <a:r>
-              <a:rPr lang="zh-CN" sz="1464" dirty="0">
-                <a:solidFill>
-                  <a:srgbClr val="2C6B57"/>
-                </a:solidFill>
-                <a:latin typeface="Noto Sans Mono CJK SC"/>
-                <a:ea typeface="Noto Sans Mono CJK SC"/>
-                <a:cs typeface="Noto Sans Mono CJK SC"/>
-              </a:rPr>
-              <a:t>size_t</a:t>
-            </a:r>
-            <a:r>
-              <a:rPr lang="zh-CN" sz="1464" dirty="0">
-                <a:solidFill>
-                  <a:srgbClr val="1A1A18"/>
-                </a:solidFill>
-                <a:latin typeface="Noto Sans Mono CJK SC"/>
-                <a:ea typeface="Noto Sans Mono CJK SC"/>
-                <a:cs typeface="Noto Sans Mono CJK SC"/>
-              </a:rPr>
-              <a:t> via = </a:t>
-            </a:r>
-            <a:r>
-              <a:rPr lang="zh-CN" sz="1464" dirty="0">
-                <a:solidFill>
-                  <a:srgbClr val="4A5AA8"/>
-                </a:solidFill>
-                <a:latin typeface="Noto Sans Mono CJK SC"/>
-                <a:ea typeface="Noto Sans Mono CJK SC"/>
-                <a:cs typeface="Noto Sans Mono CJK SC"/>
-              </a:rPr>
-              <a:t>0</a:t>
-            </a:r>
-            <a:r>
-              <a:rPr lang="zh-CN" sz="1464" dirty="0">
-                <a:solidFill>
-                  <a:srgbClr val="1A1A18"/>
-                </a:solidFill>
-                <a:latin typeface="Noto Sans Mono CJK SC"/>
-                <a:ea typeface="Noto Sans Mono CJK SC"/>
-                <a:cs typeface="Noto Sans Mono CJK SC"/>
-              </a:rPr>
-              <a:t>; via &lt; vertices(); ++via) {</a:t>
+              <a:t>return</a:t>
+            </a:r>
+            <a:r>
+              <a:rPr lang="zh-CN" sz="1056" dirty="0">
+                <a:solidFill>
+                  <a:srgbClr val="1A1A18"/>
+                </a:solidFill>
+                <a:latin typeface="Noto Sans Mono CJK SC"/>
+                <a:ea typeface="Noto Sans Mono CJK SC"/>
+                <a:cs typeface="Noto Sans Mono CJK SC"/>
+              </a:rPr>
+              <a:t> distance;</a:t>
             </a:r>
           </a:p>
           <a:p>
@@ -7709,373 +8312,7 @@
               <a:buNone/>
             </a:pPr>
             <a:r>
-              <a:rPr lang="zh-CN" sz="1464" dirty="0">
-                <a:solidFill>
-                  <a:srgbClr val="1A1A18"/>
-                </a:solidFill>
-                <a:latin typeface="Noto Sans Mono CJK SC"/>
-                <a:ea typeface="Noto Sans Mono CJK SC"/>
-                <a:cs typeface="Noto Sans Mono CJK SC"/>
-              </a:rPr>
-              <a:t>        </a:t>
-            </a:r>
-            <a:r>
-              <a:rPr lang="zh-CN" sz="1464" dirty="0">
-                <a:solidFill>
-                  <a:srgbClr val="8A4B2A"/>
-                </a:solidFill>
-                <a:latin typeface="Noto Sans Mono CJK SC"/>
-                <a:ea typeface="Noto Sans Mono CJK SC"/>
-                <a:cs typeface="Noto Sans Mono CJK SC"/>
-              </a:rPr>
-              <a:t>for</a:t>
-            </a:r>
-            <a:r>
-              <a:rPr lang="zh-CN" sz="1464" dirty="0">
-                <a:solidFill>
-                  <a:srgbClr val="1A1A18"/>
-                </a:solidFill>
-                <a:latin typeface="Noto Sans Mono CJK SC"/>
-                <a:ea typeface="Noto Sans Mono CJK SC"/>
-                <a:cs typeface="Noto Sans Mono CJK SC"/>
-              </a:rPr>
-              <a:t> (std::</a:t>
-            </a:r>
-            <a:r>
-              <a:rPr lang="zh-CN" sz="1464" dirty="0">
-                <a:solidFill>
-                  <a:srgbClr val="2C6B57"/>
-                </a:solidFill>
-                <a:latin typeface="Noto Sans Mono CJK SC"/>
-                <a:ea typeface="Noto Sans Mono CJK SC"/>
-                <a:cs typeface="Noto Sans Mono CJK SC"/>
-              </a:rPr>
-              <a:t>size_t</a:t>
-            </a:r>
-            <a:r>
-              <a:rPr lang="zh-CN" sz="1464" dirty="0">
-                <a:solidFill>
-                  <a:srgbClr val="1A1A18"/>
-                </a:solidFill>
-                <a:latin typeface="Noto Sans Mono CJK SC"/>
-                <a:ea typeface="Noto Sans Mono CJK SC"/>
-                <a:cs typeface="Noto Sans Mono CJK SC"/>
-              </a:rPr>
-              <a:t> from = </a:t>
-            </a:r>
-            <a:r>
-              <a:rPr lang="zh-CN" sz="1464" dirty="0">
-                <a:solidFill>
-                  <a:srgbClr val="4A5AA8"/>
-                </a:solidFill>
-                <a:latin typeface="Noto Sans Mono CJK SC"/>
-                <a:ea typeface="Noto Sans Mono CJK SC"/>
-                <a:cs typeface="Noto Sans Mono CJK SC"/>
-              </a:rPr>
-              <a:t>0</a:t>
-            </a:r>
-            <a:r>
-              <a:rPr lang="zh-CN" sz="1464" dirty="0">
-                <a:solidFill>
-                  <a:srgbClr val="1A1A18"/>
-                </a:solidFill>
-                <a:latin typeface="Noto Sans Mono CJK SC"/>
-                <a:ea typeface="Noto Sans Mono CJK SC"/>
-                <a:cs typeface="Noto Sans Mono CJK SC"/>
-              </a:rPr>
-              <a:t>; from &lt; vertices(); ++from) {</a:t>
-            </a:r>
-          </a:p>
-          <a:p>
-            <a:pPr marL="0" indent="0" lvl="0">
-              <a:lnSpc>
-                <a:spcPct val="104000"/>
-              </a:lnSpc>
-              <a:buNone/>
-            </a:pPr>
-            <a:r>
-              <a:rPr lang="zh-CN" sz="1464" dirty="0">
-                <a:solidFill>
-                  <a:srgbClr val="1A1A18"/>
-                </a:solidFill>
-                <a:latin typeface="Noto Sans Mono CJK SC"/>
-                <a:ea typeface="Noto Sans Mono CJK SC"/>
-                <a:cs typeface="Noto Sans Mono CJK SC"/>
-              </a:rPr>
-              <a:t>            </a:t>
-            </a:r>
-            <a:r>
-              <a:rPr lang="zh-CN" sz="1464" dirty="0">
-                <a:solidFill>
-                  <a:srgbClr val="8A4B2A"/>
-                </a:solidFill>
-                <a:latin typeface="Noto Sans Mono CJK SC"/>
-                <a:ea typeface="Noto Sans Mono CJK SC"/>
-                <a:cs typeface="Noto Sans Mono CJK SC"/>
-              </a:rPr>
-              <a:t>for</a:t>
-            </a:r>
-            <a:r>
-              <a:rPr lang="zh-CN" sz="1464" dirty="0">
-                <a:solidFill>
-                  <a:srgbClr val="1A1A18"/>
-                </a:solidFill>
-                <a:latin typeface="Noto Sans Mono CJK SC"/>
-                <a:ea typeface="Noto Sans Mono CJK SC"/>
-                <a:cs typeface="Noto Sans Mono CJK SC"/>
-              </a:rPr>
-              <a:t> (std::</a:t>
-            </a:r>
-            <a:r>
-              <a:rPr lang="zh-CN" sz="1464" dirty="0">
-                <a:solidFill>
-                  <a:srgbClr val="2C6B57"/>
-                </a:solidFill>
-                <a:latin typeface="Noto Sans Mono CJK SC"/>
-                <a:ea typeface="Noto Sans Mono CJK SC"/>
-                <a:cs typeface="Noto Sans Mono CJK SC"/>
-              </a:rPr>
-              <a:t>size_t</a:t>
-            </a:r>
-            <a:r>
-              <a:rPr lang="zh-CN" sz="1464" dirty="0">
-                <a:solidFill>
-                  <a:srgbClr val="1A1A18"/>
-                </a:solidFill>
-                <a:latin typeface="Noto Sans Mono CJK SC"/>
-                <a:ea typeface="Noto Sans Mono CJK SC"/>
-                <a:cs typeface="Noto Sans Mono CJK SC"/>
-              </a:rPr>
-              <a:t> to = </a:t>
-            </a:r>
-            <a:r>
-              <a:rPr lang="zh-CN" sz="1464" dirty="0">
-                <a:solidFill>
-                  <a:srgbClr val="4A5AA8"/>
-                </a:solidFill>
-                <a:latin typeface="Noto Sans Mono CJK SC"/>
-                <a:ea typeface="Noto Sans Mono CJK SC"/>
-                <a:cs typeface="Noto Sans Mono CJK SC"/>
-              </a:rPr>
-              <a:t>0</a:t>
-            </a:r>
-            <a:r>
-              <a:rPr lang="zh-CN" sz="1464" dirty="0">
-                <a:solidFill>
-                  <a:srgbClr val="1A1A18"/>
-                </a:solidFill>
-                <a:latin typeface="Noto Sans Mono CJK SC"/>
-                <a:ea typeface="Noto Sans Mono CJK SC"/>
-                <a:cs typeface="Noto Sans Mono CJK SC"/>
-              </a:rPr>
-              <a:t>; to &lt; vertices(); ++to) {</a:t>
-            </a:r>
-          </a:p>
-          <a:p>
-            <a:pPr marL="0" indent="0" lvl="0">
-              <a:lnSpc>
-                <a:spcPct val="104000"/>
-              </a:lnSpc>
-              <a:buNone/>
-            </a:pPr>
-            <a:r>
-              <a:rPr lang="zh-CN" sz="1464" dirty="0">
-                <a:solidFill>
-                  <a:srgbClr val="1A1A18"/>
-                </a:solidFill>
-                <a:latin typeface="Noto Sans Mono CJK SC"/>
-                <a:ea typeface="Noto Sans Mono CJK SC"/>
-                <a:cs typeface="Noto Sans Mono CJK SC"/>
-              </a:rPr>
-              <a:t>                </a:t>
-            </a:r>
-            <a:r>
-              <a:rPr lang="zh-CN" sz="1464" dirty="0">
-                <a:solidFill>
-                  <a:srgbClr val="8A4B2A"/>
-                </a:solidFill>
-                <a:latin typeface="Noto Sans Mono CJK SC"/>
-                <a:ea typeface="Noto Sans Mono CJK SC"/>
-                <a:cs typeface="Noto Sans Mono CJK SC"/>
-              </a:rPr>
-              <a:t>if</a:t>
-            </a:r>
-            <a:r>
-              <a:rPr lang="zh-CN" sz="1464" dirty="0">
-                <a:solidFill>
-                  <a:srgbClr val="1A1A18"/>
-                </a:solidFill>
-                <a:latin typeface="Noto Sans Mono CJK SC"/>
-                <a:ea typeface="Noto Sans Mono CJK SC"/>
-                <a:cs typeface="Noto Sans Mono CJK SC"/>
-              </a:rPr>
-              <a:t> (distance[from][via] &lt; infinity &amp;&amp; distance[via][to] &lt; infinity) {</a:t>
-            </a:r>
-          </a:p>
-          <a:p>
-            <a:pPr marL="0" indent="0" lvl="0">
-              <a:lnSpc>
-                <a:spcPct val="104000"/>
-              </a:lnSpc>
-              <a:buNone/>
-            </a:pPr>
-            <a:r>
-              <a:rPr lang="zh-CN" sz="1464" dirty="0">
-                <a:solidFill>
-                  <a:srgbClr val="1A1A18"/>
-                </a:solidFill>
-                <a:latin typeface="Noto Sans Mono CJK SC"/>
-                <a:ea typeface="Noto Sans Mono CJK SC"/>
-                <a:cs typeface="Noto Sans Mono CJK SC"/>
-              </a:rPr>
-              <a:t>                    distance[from][to] = std::min(</a:t>
-            </a:r>
-          </a:p>
-          <a:p>
-            <a:pPr marL="0" indent="0" lvl="0">
-              <a:lnSpc>
-                <a:spcPct val="104000"/>
-              </a:lnSpc>
-              <a:buNone/>
-            </a:pPr>
-            <a:r>
-              <a:rPr lang="zh-CN" sz="1464" dirty="0">
-                <a:solidFill>
-                  <a:srgbClr val="1A1A18"/>
-                </a:solidFill>
-                <a:latin typeface="Noto Sans Mono CJK SC"/>
-                <a:ea typeface="Noto Sans Mono CJK SC"/>
-                <a:cs typeface="Noto Sans Mono CJK SC"/>
-              </a:rPr>
-              <a:t>                        distance[from][to], distance[from][via] + distance[via][to]);</a:t>
-            </a:r>
-          </a:p>
-          <a:p>
-            <a:pPr marL="0" indent="0" lvl="0">
-              <a:lnSpc>
-                <a:spcPct val="104000"/>
-              </a:lnSpc>
-              <a:buNone/>
-            </a:pPr>
-            <a:r>
-              <a:rPr lang="zh-CN" sz="1464" dirty="0">
-                <a:solidFill>
-                  <a:srgbClr val="1A1A18"/>
-                </a:solidFill>
-                <a:latin typeface="Noto Sans Mono CJK SC"/>
-                <a:ea typeface="Noto Sans Mono CJK SC"/>
-                <a:cs typeface="Noto Sans Mono CJK SC"/>
-              </a:rPr>
-              <a:t>                }</a:t>
-            </a:r>
-          </a:p>
-          <a:p>
-            <a:pPr marL="0" indent="0" lvl="0">
-              <a:lnSpc>
-                <a:spcPct val="104000"/>
-              </a:lnSpc>
-              <a:buNone/>
-            </a:pPr>
-            <a:r>
-              <a:rPr lang="zh-CN" sz="1464" dirty="0">
-                <a:solidFill>
-                  <a:srgbClr val="1A1A18"/>
-                </a:solidFill>
-                <a:latin typeface="Noto Sans Mono CJK SC"/>
-                <a:ea typeface="Noto Sans Mono CJK SC"/>
-                <a:cs typeface="Noto Sans Mono CJK SC"/>
-              </a:rPr>
-              <a:t>            }</a:t>
-            </a:r>
-          </a:p>
-          <a:p>
-            <a:pPr marL="0" indent="0" lvl="0">
-              <a:lnSpc>
-                <a:spcPct val="104000"/>
-              </a:lnSpc>
-              <a:buNone/>
-            </a:pPr>
-            <a:r>
-              <a:rPr lang="zh-CN" sz="1464" dirty="0">
-                <a:solidFill>
-                  <a:srgbClr val="1A1A18"/>
-                </a:solidFill>
-                <a:latin typeface="Noto Sans Mono CJK SC"/>
-                <a:ea typeface="Noto Sans Mono CJK SC"/>
-                <a:cs typeface="Noto Sans Mono CJK SC"/>
-              </a:rPr>
-              <a:t>        }</a:t>
-            </a:r>
-          </a:p>
-          <a:p>
-            <a:pPr marL="0" indent="0" lvl="0">
-              <a:lnSpc>
-                <a:spcPct val="104000"/>
-              </a:lnSpc>
-              <a:buNone/>
-            </a:pPr>
-            <a:r>
-              <a:rPr lang="zh-CN" sz="1464" dirty="0">
-                <a:solidFill>
-                  <a:srgbClr val="1A1A18"/>
-                </a:solidFill>
-                <a:latin typeface="Noto Sans Mono CJK SC"/>
-                <a:ea typeface="Noto Sans Mono CJK SC"/>
-                <a:cs typeface="Noto Sans Mono CJK SC"/>
-              </a:rPr>
-              <a:t>    }</a:t>
-            </a:r>
-          </a:p>
-          <a:p>
-            <a:pPr marL="0" indent="0" lvl="0">
-              <a:lnSpc>
-                <a:spcPct val="104000"/>
-              </a:lnSpc>
-              <a:buNone/>
-            </a:pPr>
-            <a:r>
-              <a:rPr lang="zh-CN" sz="1464" dirty="0">
-                <a:solidFill>
-                  <a:srgbClr val="1A1A18"/>
-                </a:solidFill>
-                <a:latin typeface="Noto Sans Mono CJK SC"/>
-                <a:ea typeface="Noto Sans Mono CJK SC"/>
-                <a:cs typeface="Noto Sans Mono CJK SC"/>
-              </a:rPr>
-              <a:t>    </a:t>
-            </a:r>
-            <a:r>
-              <a:rPr lang="zh-CN" sz="1464" dirty="0">
-                <a:solidFill>
-                  <a:srgbClr val="8A4B2A"/>
-                </a:solidFill>
-                <a:latin typeface="Noto Sans Mono CJK SC"/>
-                <a:ea typeface="Noto Sans Mono CJK SC"/>
-                <a:cs typeface="Noto Sans Mono CJK SC"/>
-              </a:rPr>
-              <a:t>return</a:t>
-            </a:r>
-            <a:r>
-              <a:rPr lang="zh-CN" sz="1464" dirty="0">
-                <a:solidFill>
-                  <a:srgbClr val="1A1A18"/>
-                </a:solidFill>
-                <a:latin typeface="Noto Sans Mono CJK SC"/>
-                <a:ea typeface="Noto Sans Mono CJK SC"/>
-                <a:cs typeface="Noto Sans Mono CJK SC"/>
-              </a:rPr>
-              <a:t> distance;</a:t>
-            </a:r>
-          </a:p>
-          <a:p>
-            <a:pPr marL="0" indent="0" lvl="0">
-              <a:lnSpc>
-                <a:spcPct val="104000"/>
-              </a:lnSpc>
-              <a:buNone/>
-            </a:pPr>
-            <a:r>
-              <a:rPr lang="zh-CN" sz="1464" dirty="0">
+              <a:rPr lang="zh-CN" sz="1056" dirty="0">
                 <a:solidFill>
                   <a:srgbClr val="1A1A18"/>
                 </a:solidFill>
@@ -8096,8 +8333,8 @@
         </p:nvSpPr>
         <p:spPr>
           <a:xfrm>
-            <a:off x="566928" y="5353324"/>
-            <a:ext cx="11058144" cy="373715"/>
+            <a:off x="566928" y="5658520"/>
+            <a:ext cx="11058144" cy="269565"/>
           </a:xfrm>
           <a:prstGeom prst="rect">
             <a:avLst/>
@@ -8117,7 +8354,7 @@
               <a:buNone/>
             </a:pPr>
             <a:r>
-              <a:rPr lang="zh-CN" sz="2196" dirty="0">
+              <a:rPr lang="zh-CN" sz="1584" dirty="0">
                 <a:solidFill>
                   <a:srgbClr val="1A1A18"/>
                 </a:solidFill>
@@ -8128,7 +8365,7 @@
               <a:t>递推的含义：</a:t>
             </a:r>
             <a:r>
-              <a:rPr lang="zh-CN" sz="2196" dirty="0" b="1">
+              <a:rPr lang="zh-CN" sz="1584" dirty="0" b="1">
                 <a:solidFill>
                   <a:srgbClr val="8A4B2A"/>
                 </a:solidFill>
@@ -8139,7 +8376,7 @@
               <a:t>允许经过前 k 个顶点中转时的最短路</a:t>
             </a:r>
             <a:r>
-              <a:rPr lang="zh-CN" sz="2196" dirty="0">
+              <a:rPr lang="zh-CN" sz="1584" dirty="0">
                 <a:solidFill>
                   <a:srgbClr val="1A1A18"/>
                 </a:solidFill>
@@ -8160,8 +8397,8 @@
         </p:nvSpPr>
         <p:spPr>
           <a:xfrm>
-            <a:off x="566928" y="5789015"/>
-            <a:ext cx="11058144" cy="373715"/>
+            <a:off x="566928" y="5972789"/>
+            <a:ext cx="11058144" cy="269565"/>
           </a:xfrm>
           <a:prstGeom prst="rect">
             <a:avLst/>
@@ -8181,7 +8418,7 @@
               <a:buNone/>
             </a:pPr>
             <a:r>
-              <a:rPr lang="zh-CN" sz="2196" dirty="0" b="1">
+              <a:rPr lang="zh-CN" sz="1584" dirty="0" b="1">
                 <a:solidFill>
                   <a:srgbClr val="8A4B2A"/>
                 </a:solidFill>
@@ -8192,7 +8429,7 @@
               <a:t>k 必须在最外层</a:t>
             </a:r>
             <a:r>
-              <a:rPr lang="zh-CN" sz="2196" dirty="0">
+              <a:rPr lang="zh-CN" sz="1584" dirty="0">
                 <a:solidFill>
                   <a:srgbClr val="1A1A18"/>
                 </a:solidFill>
@@ -14286,7 +14523,7 @@
                 <a:ea typeface="Noto Sans Mono CJK SC"/>
                 <a:cs typeface="Noto Sans Mono CJK SC"/>
               </a:rPr>
-              <a:t>    distance = [self.infinity] * self.vertices</a:t>
+              <a:t>    distance = [self.unreachable] * self.vertices</a:t>
             </a:r>
           </a:p>
           <a:p>
@@ -14568,7 +14805,7 @@
                 <a:ea typeface="Noto Sans Mono CJK SC"/>
                 <a:cs typeface="Noto Sans Mono CJK SC"/>
               </a:rPr>
-              <a:t> distance[vertex] == self.infinity:</a:t>
+              <a:t> distance[vertex] == self.unreachable:</a:t>
             </a:r>
           </a:p>
           <a:p>

--- a/book/slides/pptx/ch07-graph.pptx
+++ b/book/slides/pptx/ch07-graph.pptx
@@ -22426,4 +22426,116 @@
     </a:fmtScheme>
   </a:themeElements>
 </a:theme>
+</file>
+
+<file path=ppt/theme/theme2.xml><?xml version="1.0" encoding="utf-8"?>
+<a:theme xmlns:a="http://schemas.openxmlformats.org/drawingml/2006/main" name="dsa">
+  <a:themeElements>
+    <a:clrScheme name="dsa">
+      <a:dk1>
+        <a:sysClr val="windowText" lastClr="000000"/>
+      </a:dk1>
+      <a:lt1>
+        <a:sysClr val="window" lastClr="FFFFFF"/>
+      </a:lt1>
+      <a:dk2>
+        <a:srgbClr val="1A1A18"/>
+      </a:dk2>
+      <a:lt2>
+        <a:srgbClr val="FDFDFC"/>
+      </a:lt2>
+      <a:accent1>
+        <a:srgbClr val="8A4B2A"/>
+      </a:accent1>
+      <a:accent2>
+        <a:srgbClr val="2C6B57"/>
+      </a:accent2>
+      <a:accent3>
+        <a:srgbClr val="7A5C1E"/>
+      </a:accent3>
+      <a:accent4>
+        <a:srgbClr val="4A5AA8"/>
+      </a:accent4>
+      <a:accent5>
+        <a:srgbClr val="6B6B66"/>
+      </a:accent5>
+      <a:accent6>
+        <a:srgbClr val="DCDCD6"/>
+      </a:accent6>
+      <a:hlink>
+        <a:srgbClr val="8A4B2A"/>
+      </a:hlink>
+      <a:folHlink>
+        <a:srgbClr val="6B6B66"/>
+      </a:folHlink>
+    </a:clrScheme>
+    <a:fontScheme name="dsa">
+      <a:majorFont>
+        <a:latin typeface="Segoe UI"/>
+        <a:ea typeface="Noto Sans CJK SC"/>
+        <a:cs typeface=""/>
+      </a:majorFont>
+      <a:minorFont>
+        <a:latin typeface="Segoe UI"/>
+        <a:ea typeface="Noto Sans CJK SC"/>
+        <a:cs typeface=""/>
+      </a:minorFont>
+    </a:fontScheme>
+    <a:fmtScheme name="dsa">
+      <a:fillStyleLst>
+        <a:solidFill>
+          <a:schemeClr val="phClr"/>
+        </a:solidFill>
+        <a:solidFill>
+          <a:schemeClr val="phClr"/>
+        </a:solidFill>
+        <a:solidFill>
+          <a:schemeClr val="phClr"/>
+        </a:solidFill>
+      </a:fillStyleLst>
+      <a:lnStyleLst>
+        <a:ln w="6350" cap="flat" cmpd="sng" algn="ctr">
+          <a:solidFill>
+            <a:schemeClr val="phClr"/>
+          </a:solidFill>
+          <a:prstDash val="solid"/>
+        </a:ln>
+        <a:ln w="6350" cap="flat" cmpd="sng" algn="ctr">
+          <a:solidFill>
+            <a:schemeClr val="phClr"/>
+          </a:solidFill>
+          <a:prstDash val="solid"/>
+        </a:ln>
+        <a:ln w="6350" cap="flat" cmpd="sng" algn="ctr">
+          <a:solidFill>
+            <a:schemeClr val="phClr"/>
+          </a:solidFill>
+          <a:prstDash val="solid"/>
+        </a:ln>
+      </a:lnStyleLst>
+      <a:effectStyleLst>
+        <a:effectStyle>
+          <a:effectLst/>
+        </a:effectStyle>
+        <a:effectStyle>
+          <a:effectLst/>
+        </a:effectStyle>
+        <a:effectStyle>
+          <a:effectLst/>
+        </a:effectStyle>
+      </a:effectStyleLst>
+      <a:bgFillStyleLst>
+        <a:solidFill>
+          <a:schemeClr val="phClr"/>
+        </a:solidFill>
+        <a:solidFill>
+          <a:schemeClr val="phClr"/>
+        </a:solidFill>
+        <a:solidFill>
+          <a:schemeClr val="phClr"/>
+        </a:solidFill>
+      </a:bgFillStyleLst>
+    </a:fmtScheme>
+  </a:themeElements>
+</a:theme>
 </file>